--- a/Postbac poster day.pptx
+++ b/Postbac poster day.pptx
@@ -119,7 +119,18 @@
   </p:defaultTextStyle>
   <p:extLst>
     <p:ext uri="{EFAFB233-063F-42B5-8137-9DF3F51BA10A}">
-      <p15:sldGuideLst xmlns:p15="http://schemas.microsoft.com/office/powerpoint/2012/main"/>
+      <p15:sldGuideLst xmlns:p15="http://schemas.microsoft.com/office/powerpoint/2012/main">
+        <p15:guide id="1" orient="horz" pos="10368" userDrawn="1">
+          <p15:clr>
+            <a:srgbClr val="A4A3A4"/>
+          </p15:clr>
+        </p15:guide>
+        <p15:guide id="2" pos="13824" userDrawn="1">
+          <p15:clr>
+            <a:srgbClr val="A4A3A4"/>
+          </p15:clr>
+        </p15:guide>
+      </p15:sldGuideLst>
     </p:ext>
   </p:extLst>
 </p:presentation>
@@ -1527,6 +1538,102 @@
     <p:extLst>
       <p:ext uri="{BB962C8B-B14F-4D97-AF65-F5344CB8AC3E}">
         <p14:creationId xmlns:p14="http://schemas.microsoft.com/office/powerpoint/2010/main" val="2606644817"/>
+      </p:ext>
+    </p:extLst>
+  </p:cSld>
+  <p:clrMapOvr>
+    <a:masterClrMapping/>
+  </p:clrMapOvr>
+</p:notes>
+</file>
+
+<file path=ppt/notesSlides/notesSlide2.xml><?xml version="1.0" encoding="utf-8"?>
+<p:notes xmlns:a="http://schemas.openxmlformats.org/drawingml/2006/main" xmlns:r="http://schemas.openxmlformats.org/officeDocument/2006/relationships" xmlns:p="http://schemas.openxmlformats.org/presentationml/2006/main">
+  <p:cSld>
+    <p:spTree>
+      <p:nvGrpSpPr>
+        <p:cNvPr id="1" name=""/>
+        <p:cNvGrpSpPr/>
+        <p:nvPr/>
+      </p:nvGrpSpPr>
+      <p:grpSpPr>
+        <a:xfrm>
+          <a:off x="0" y="0"/>
+          <a:ext cx="0" cy="0"/>
+          <a:chOff x="0" y="0"/>
+          <a:chExt cx="0" cy="0"/>
+        </a:xfrm>
+      </p:grpSpPr>
+      <p:sp>
+        <p:nvSpPr>
+          <p:cNvPr id="2" name="Slide Image Placeholder 1"/>
+          <p:cNvSpPr>
+            <a:spLocks noGrp="1" noRot="1" noChangeAspect="1"/>
+          </p:cNvSpPr>
+          <p:nvPr>
+            <p:ph type="sldImg"/>
+          </p:nvPr>
+        </p:nvSpPr>
+        <p:spPr/>
+      </p:sp>
+      <p:sp>
+        <p:nvSpPr>
+          <p:cNvPr id="3" name="Notes Placeholder 2"/>
+          <p:cNvSpPr>
+            <a:spLocks noGrp="1"/>
+          </p:cNvSpPr>
+          <p:nvPr>
+            <p:ph type="body" idx="1"/>
+          </p:nvPr>
+        </p:nvSpPr>
+        <p:spPr/>
+        <p:txBody>
+          <a:bodyPr/>
+          <a:lstStyle/>
+          <a:p>
+            <a:r>
+              <a:rPr lang="en-US" dirty="0"/>
+              <a:t>[1] https://www.nature.com/articles/ncomms10499</a:t>
+            </a:r>
+          </a:p>
+          <a:p>
+            <a:r>
+              <a:rPr lang="en-US" dirty="0"/>
+              <a:t>[2] https://pmc.ncbi.nlm.nih.gov/articles/PMC6318940/</a:t>
+            </a:r>
+          </a:p>
+          <a:p>
+            <a:endParaRPr lang="en-US" dirty="0"/>
+          </a:p>
+        </p:txBody>
+      </p:sp>
+      <p:sp>
+        <p:nvSpPr>
+          <p:cNvPr id="4" name="Slide Number Placeholder 3"/>
+          <p:cNvSpPr>
+            <a:spLocks noGrp="1"/>
+          </p:cNvSpPr>
+          <p:nvPr>
+            <p:ph type="sldNum" sz="quarter" idx="5"/>
+          </p:nvPr>
+        </p:nvSpPr>
+        <p:spPr/>
+        <p:txBody>
+          <a:bodyPr/>
+          <a:lstStyle/>
+          <a:p>
+            <a:fld id="{25CD508A-D768-4622-8FD2-0607840A956A}" type="slidenum">
+              <a:rPr lang="en-US" smtClean="0"/>
+              <a:t>10</a:t>
+            </a:fld>
+            <a:endParaRPr lang="en-US"/>
+          </a:p>
+        </p:txBody>
+      </p:sp>
+    </p:spTree>
+    <p:extLst>
+      <p:ext uri="{BB962C8B-B14F-4D97-AF65-F5344CB8AC3E}">
+        <p14:creationId xmlns:p14="http://schemas.microsoft.com/office/powerpoint/2010/main" val="489639470"/>
       </p:ext>
     </p:extLst>
   </p:cSld>
@@ -4505,7 +4612,7 @@
         <p:spPr>
           <a:xfrm>
             <a:off x="0" y="0"/>
-            <a:ext cx="43891200" cy="4572000"/>
+            <a:ext cx="43891200" cy="3204825"/>
           </a:xfrm>
           <a:prstGeom prst="rect">
             <a:avLst/>
@@ -4607,8 +4714,8 @@
         </p:nvGrpSpPr>
         <p:grpSpPr>
           <a:xfrm>
-            <a:off x="1790700" y="5624214"/>
-            <a:ext cx="10058400" cy="5486400"/>
+            <a:off x="1831556" y="3483436"/>
+            <a:ext cx="14139111" cy="11004441"/>
             <a:chOff x="1924050" y="5572720"/>
             <a:chExt cx="6362700" cy="5296585"/>
           </a:xfrm>
@@ -4719,578 +4826,7 @@
             <a:bodyPr rtlCol="0" anchor="ctr"/>
             <a:lstStyle/>
             <a:p>
-              <a:pPr algn="ctr"/>
-              <a:endParaRPr lang="en-US"/>
-            </a:p>
-          </p:txBody>
-        </p:sp>
-      </p:grpSp>
-      <p:sp>
-        <p:nvSpPr>
-          <p:cNvPr id="20" name="TextBox 19">
-            <a:extLst>
-              <a:ext uri="{FF2B5EF4-FFF2-40B4-BE49-F238E27FC236}">
-                <a16:creationId xmlns:a16="http://schemas.microsoft.com/office/drawing/2014/main" id="{C68B687D-12AE-8EDD-59B2-640C9BBA89A7}"/>
-              </a:ext>
-            </a:extLst>
-          </p:cNvPr>
-          <p:cNvSpPr txBox="1"/>
-          <p:nvPr/>
-        </p:nvSpPr>
-        <p:spPr>
-          <a:xfrm>
-            <a:off x="7410450" y="16623625"/>
-            <a:ext cx="6229350" cy="923330"/>
-          </a:xfrm>
-          <a:prstGeom prst="rect">
-            <a:avLst/>
-          </a:prstGeom>
-          <a:noFill/>
-        </p:spPr>
-        <p:txBody>
-          <a:bodyPr wrap="square">
-            <a:spAutoFit/>
-          </a:bodyPr>
-          <a:lstStyle/>
-          <a:p>
-            <a:pPr algn="ctr"/>
-            <a:r>
-              <a:rPr lang="en-US" sz="5400" dirty="0">
-                <a:solidFill>
-                  <a:schemeClr val="bg1"/>
-                </a:solidFill>
-                <a:latin typeface="Helvetica" panose="020B0604020202020204" pitchFamily="34" charset="0"/>
-                <a:cs typeface="Helvetica" panose="020B0604020202020204" pitchFamily="34" charset="0"/>
-              </a:rPr>
-              <a:t>Introduction</a:t>
-            </a:r>
-          </a:p>
-        </p:txBody>
-      </p:sp>
-      <p:grpSp>
-        <p:nvGrpSpPr>
-          <p:cNvPr id="24" name="Group 23">
-            <a:extLst>
-              <a:ext uri="{FF2B5EF4-FFF2-40B4-BE49-F238E27FC236}">
-                <a16:creationId xmlns:a16="http://schemas.microsoft.com/office/drawing/2014/main" id="{5351018F-31DD-0E63-2FFB-2425C214E913}"/>
-              </a:ext>
-            </a:extLst>
-          </p:cNvPr>
-          <p:cNvGrpSpPr/>
-          <p:nvPr/>
-        </p:nvGrpSpPr>
-        <p:grpSpPr>
-          <a:xfrm>
-            <a:off x="1790700" y="12645762"/>
-            <a:ext cx="10058400" cy="5486400"/>
-            <a:chOff x="1924050" y="5572720"/>
-            <a:chExt cx="6362700" cy="5296585"/>
-          </a:xfrm>
-        </p:grpSpPr>
-        <p:sp>
-          <p:nvSpPr>
-            <p:cNvPr id="25" name="Rectangle 24">
-              <a:extLst>
-                <a:ext uri="{FF2B5EF4-FFF2-40B4-BE49-F238E27FC236}">
-                  <a16:creationId xmlns:a16="http://schemas.microsoft.com/office/drawing/2014/main" id="{CE36AD40-FF0F-9D84-F1A8-DBA871055B69}"/>
-                </a:ext>
-              </a:extLst>
-            </p:cNvPr>
-            <p:cNvSpPr/>
-            <p:nvPr/>
-          </p:nvSpPr>
-          <p:spPr>
-            <a:xfrm>
-              <a:off x="1924050" y="5572720"/>
-              <a:ext cx="6362700" cy="923330"/>
-            </a:xfrm>
-            <a:prstGeom prst="rect">
-              <a:avLst/>
-            </a:prstGeom>
-            <a:solidFill>
-              <a:schemeClr val="accent1">
-                <a:lumMod val="50000"/>
-              </a:schemeClr>
-            </a:solidFill>
-          </p:spPr>
-          <p:style>
-            <a:lnRef idx="2">
-              <a:schemeClr val="accent1">
-                <a:shade val="15000"/>
-              </a:schemeClr>
-            </a:lnRef>
-            <a:fillRef idx="1">
-              <a:schemeClr val="accent1"/>
-            </a:fillRef>
-            <a:effectRef idx="0">
-              <a:schemeClr val="accent1"/>
-            </a:effectRef>
-            <a:fontRef idx="minor">
-              <a:schemeClr val="lt1"/>
-            </a:fontRef>
-          </p:style>
-          <p:txBody>
-            <a:bodyPr rtlCol="0" anchor="ctr"/>
-            <a:lstStyle/>
-            <a:p>
-              <a:pPr algn="ctr"/>
-              <a:r>
-                <a:rPr lang="en-US" sz="5400" dirty="0">
-                  <a:latin typeface="Helvetica" panose="020B0604020202020204" pitchFamily="34" charset="0"/>
-                  <a:cs typeface="Helvetica" panose="020B0604020202020204" pitchFamily="34" charset="0"/>
-                </a:rPr>
-                <a:t>Hypothesis</a:t>
-              </a:r>
-            </a:p>
-          </p:txBody>
-        </p:sp>
-        <p:sp>
-          <p:nvSpPr>
-            <p:cNvPr id="26" name="Rectangle 25">
-              <a:extLst>
-                <a:ext uri="{FF2B5EF4-FFF2-40B4-BE49-F238E27FC236}">
-                  <a16:creationId xmlns:a16="http://schemas.microsoft.com/office/drawing/2014/main" id="{E0713B02-2457-7250-1C38-BB2E15F06985}"/>
-                </a:ext>
-              </a:extLst>
-            </p:cNvPr>
-            <p:cNvSpPr/>
-            <p:nvPr/>
-          </p:nvSpPr>
-          <p:spPr>
-            <a:xfrm>
-              <a:off x="1924050" y="5649605"/>
-              <a:ext cx="6362700" cy="5219700"/>
-            </a:xfrm>
-            <a:prstGeom prst="rect">
-              <a:avLst/>
-            </a:prstGeom>
-            <a:noFill/>
-            <a:ln>
-              <a:solidFill>
-                <a:schemeClr val="tx2">
-                  <a:lumMod val="50000"/>
-                </a:schemeClr>
-              </a:solidFill>
-            </a:ln>
-          </p:spPr>
-          <p:style>
-            <a:lnRef idx="2">
-              <a:schemeClr val="accent1">
-                <a:shade val="15000"/>
-              </a:schemeClr>
-            </a:lnRef>
-            <a:fillRef idx="1">
-              <a:schemeClr val="accent1"/>
-            </a:fillRef>
-            <a:effectRef idx="0">
-              <a:schemeClr val="accent1"/>
-            </a:effectRef>
-            <a:fontRef idx="minor">
-              <a:schemeClr val="lt1"/>
-            </a:fontRef>
-          </p:style>
-          <p:txBody>
-            <a:bodyPr rtlCol="0" anchor="ctr"/>
-            <a:lstStyle/>
-            <a:p>
-              <a:pPr algn="ctr"/>
-              <a:endParaRPr lang="en-US"/>
-            </a:p>
-          </p:txBody>
-        </p:sp>
-      </p:grpSp>
-      <p:grpSp>
-        <p:nvGrpSpPr>
-          <p:cNvPr id="27" name="Group 26">
-            <a:extLst>
-              <a:ext uri="{FF2B5EF4-FFF2-40B4-BE49-F238E27FC236}">
-                <a16:creationId xmlns:a16="http://schemas.microsoft.com/office/drawing/2014/main" id="{70E834EE-1D04-B404-0DEC-59AB58770928}"/>
-              </a:ext>
-            </a:extLst>
-          </p:cNvPr>
-          <p:cNvGrpSpPr/>
-          <p:nvPr/>
-        </p:nvGrpSpPr>
-        <p:grpSpPr>
-          <a:xfrm>
-            <a:off x="1790700" y="20272636"/>
-            <a:ext cx="10058400" cy="5486400"/>
-            <a:chOff x="1924050" y="5572720"/>
-            <a:chExt cx="6362700" cy="5296585"/>
-          </a:xfrm>
-        </p:grpSpPr>
-        <p:sp>
-          <p:nvSpPr>
-            <p:cNvPr id="28" name="Rectangle 27">
-              <a:extLst>
-                <a:ext uri="{FF2B5EF4-FFF2-40B4-BE49-F238E27FC236}">
-                  <a16:creationId xmlns:a16="http://schemas.microsoft.com/office/drawing/2014/main" id="{F82C016C-1097-DEA1-930D-A5E849C48A6B}"/>
-                </a:ext>
-              </a:extLst>
-            </p:cNvPr>
-            <p:cNvSpPr/>
-            <p:nvPr/>
-          </p:nvSpPr>
-          <p:spPr>
-            <a:xfrm>
-              <a:off x="1924050" y="5572720"/>
-              <a:ext cx="6362700" cy="923330"/>
-            </a:xfrm>
-            <a:prstGeom prst="rect">
-              <a:avLst/>
-            </a:prstGeom>
-            <a:solidFill>
-              <a:schemeClr val="accent1">
-                <a:lumMod val="50000"/>
-              </a:schemeClr>
-            </a:solidFill>
-          </p:spPr>
-          <p:style>
-            <a:lnRef idx="2">
-              <a:schemeClr val="accent1">
-                <a:shade val="15000"/>
-              </a:schemeClr>
-            </a:lnRef>
-            <a:fillRef idx="1">
-              <a:schemeClr val="accent1"/>
-            </a:fillRef>
-            <a:effectRef idx="0">
-              <a:schemeClr val="accent1"/>
-            </a:effectRef>
-            <a:fontRef idx="minor">
-              <a:schemeClr val="lt1"/>
-            </a:fontRef>
-          </p:style>
-          <p:txBody>
-            <a:bodyPr rtlCol="0" anchor="ctr"/>
-            <a:lstStyle/>
-            <a:p>
-              <a:pPr algn="ctr"/>
-              <a:r>
-                <a:rPr lang="en-US" sz="5400" dirty="0">
-                  <a:latin typeface="Helvetica" panose="020B0604020202020204" pitchFamily="34" charset="0"/>
-                  <a:cs typeface="Helvetica" panose="020B0604020202020204" pitchFamily="34" charset="0"/>
-                </a:rPr>
-                <a:t>Methods</a:t>
-              </a:r>
-            </a:p>
-          </p:txBody>
-        </p:sp>
-        <p:sp>
-          <p:nvSpPr>
-            <p:cNvPr id="29" name="Rectangle 28">
-              <a:extLst>
-                <a:ext uri="{FF2B5EF4-FFF2-40B4-BE49-F238E27FC236}">
-                  <a16:creationId xmlns:a16="http://schemas.microsoft.com/office/drawing/2014/main" id="{9AA7E6DA-EBF8-5577-1E67-391B4AB9F41C}"/>
-                </a:ext>
-              </a:extLst>
-            </p:cNvPr>
-            <p:cNvSpPr/>
-            <p:nvPr/>
-          </p:nvSpPr>
-          <p:spPr>
-            <a:xfrm>
-              <a:off x="1924050" y="5649605"/>
-              <a:ext cx="6362700" cy="5219700"/>
-            </a:xfrm>
-            <a:prstGeom prst="rect">
-              <a:avLst/>
-            </a:prstGeom>
-            <a:noFill/>
-            <a:ln>
-              <a:solidFill>
-                <a:schemeClr val="tx2">
-                  <a:lumMod val="50000"/>
-                </a:schemeClr>
-              </a:solidFill>
-            </a:ln>
-          </p:spPr>
-          <p:style>
-            <a:lnRef idx="2">
-              <a:schemeClr val="accent1">
-                <a:shade val="15000"/>
-              </a:schemeClr>
-            </a:lnRef>
-            <a:fillRef idx="1">
-              <a:schemeClr val="accent1"/>
-            </a:fillRef>
-            <a:effectRef idx="0">
-              <a:schemeClr val="accent1"/>
-            </a:effectRef>
-            <a:fontRef idx="minor">
-              <a:schemeClr val="lt1"/>
-            </a:fontRef>
-          </p:style>
-          <p:txBody>
-            <a:bodyPr rtlCol="0" anchor="ctr"/>
-            <a:lstStyle/>
-            <a:p>
-              <a:pPr algn="ctr"/>
-              <a:endParaRPr lang="en-US"/>
-            </a:p>
-          </p:txBody>
-        </p:sp>
-      </p:grpSp>
-      <p:grpSp>
-        <p:nvGrpSpPr>
-          <p:cNvPr id="1027" name="Group 1026">
-            <a:extLst>
-              <a:ext uri="{FF2B5EF4-FFF2-40B4-BE49-F238E27FC236}">
-                <a16:creationId xmlns:a16="http://schemas.microsoft.com/office/drawing/2014/main" id="{5DA42DF9-81E2-AD77-5510-091E9500CC57}"/>
-              </a:ext>
-            </a:extLst>
-          </p:cNvPr>
-          <p:cNvGrpSpPr/>
-          <p:nvPr/>
-        </p:nvGrpSpPr>
-        <p:grpSpPr>
-          <a:xfrm>
-            <a:off x="16916400" y="5624214"/>
-            <a:ext cx="10058400" cy="5486400"/>
-            <a:chOff x="1924050" y="5572720"/>
-            <a:chExt cx="6362700" cy="5296585"/>
-          </a:xfrm>
-        </p:grpSpPr>
-        <p:sp>
-          <p:nvSpPr>
-            <p:cNvPr id="1028" name="Rectangle 1027">
-              <a:extLst>
-                <a:ext uri="{FF2B5EF4-FFF2-40B4-BE49-F238E27FC236}">
-                  <a16:creationId xmlns:a16="http://schemas.microsoft.com/office/drawing/2014/main" id="{B5AC9B94-4300-6A21-147E-076B6F2E2677}"/>
-                </a:ext>
-              </a:extLst>
-            </p:cNvPr>
-            <p:cNvSpPr/>
-            <p:nvPr/>
-          </p:nvSpPr>
-          <p:spPr>
-            <a:xfrm>
-              <a:off x="1924050" y="5572720"/>
-              <a:ext cx="6362700" cy="923330"/>
-            </a:xfrm>
-            <a:prstGeom prst="rect">
-              <a:avLst/>
-            </a:prstGeom>
-            <a:solidFill>
-              <a:schemeClr val="accent1">
-                <a:lumMod val="50000"/>
-              </a:schemeClr>
-            </a:solidFill>
-          </p:spPr>
-          <p:style>
-            <a:lnRef idx="2">
-              <a:schemeClr val="accent1">
-                <a:shade val="15000"/>
-              </a:schemeClr>
-            </a:lnRef>
-            <a:fillRef idx="1">
-              <a:schemeClr val="accent1"/>
-            </a:fillRef>
-            <a:effectRef idx="0">
-              <a:schemeClr val="accent1"/>
-            </a:effectRef>
-            <a:fontRef idx="minor">
-              <a:schemeClr val="lt1"/>
-            </a:fontRef>
-          </p:style>
-          <p:txBody>
-            <a:bodyPr rtlCol="0" anchor="ctr"/>
-            <a:lstStyle/>
-            <a:p>
-              <a:pPr algn="ctr"/>
-              <a:r>
-                <a:rPr lang="en-US" sz="5400" dirty="0">
-                  <a:latin typeface="Helvetica" panose="020B0604020202020204" pitchFamily="34" charset="0"/>
-                  <a:cs typeface="Helvetica" panose="020B0604020202020204" pitchFamily="34" charset="0"/>
-                </a:rPr>
-                <a:t>Data/Results 1</a:t>
-              </a:r>
-            </a:p>
-          </p:txBody>
-        </p:sp>
-        <p:sp>
-          <p:nvSpPr>
-            <p:cNvPr id="1029" name="Rectangle 1028">
-              <a:extLst>
-                <a:ext uri="{FF2B5EF4-FFF2-40B4-BE49-F238E27FC236}">
-                  <a16:creationId xmlns:a16="http://schemas.microsoft.com/office/drawing/2014/main" id="{8E4A9DA4-8D27-EA74-1FA0-ED41DBD6EBD7}"/>
-                </a:ext>
-              </a:extLst>
-            </p:cNvPr>
-            <p:cNvSpPr/>
-            <p:nvPr/>
-          </p:nvSpPr>
-          <p:spPr>
-            <a:xfrm>
-              <a:off x="1924050" y="5649605"/>
-              <a:ext cx="6362700" cy="5219700"/>
-            </a:xfrm>
-            <a:prstGeom prst="rect">
-              <a:avLst/>
-            </a:prstGeom>
-            <a:noFill/>
-            <a:ln>
-              <a:solidFill>
-                <a:schemeClr val="tx2">
-                  <a:lumMod val="50000"/>
-                </a:schemeClr>
-              </a:solidFill>
-            </a:ln>
-          </p:spPr>
-          <p:style>
-            <a:lnRef idx="2">
-              <a:schemeClr val="accent1">
-                <a:shade val="15000"/>
-              </a:schemeClr>
-            </a:lnRef>
-            <a:fillRef idx="1">
-              <a:schemeClr val="accent1"/>
-            </a:fillRef>
-            <a:effectRef idx="0">
-              <a:schemeClr val="accent1"/>
-            </a:effectRef>
-            <a:fontRef idx="minor">
-              <a:schemeClr val="lt1"/>
-            </a:fontRef>
-          </p:style>
-          <p:txBody>
-            <a:bodyPr rtlCol="0" anchor="ctr"/>
-            <a:lstStyle/>
-            <a:p>
-              <a:pPr algn="ctr"/>
-              <a:endParaRPr lang="en-US"/>
-            </a:p>
-          </p:txBody>
-        </p:sp>
-      </p:grpSp>
-      <p:grpSp>
-        <p:nvGrpSpPr>
-          <p:cNvPr id="1030" name="Group 1029">
-            <a:extLst>
-              <a:ext uri="{FF2B5EF4-FFF2-40B4-BE49-F238E27FC236}">
-                <a16:creationId xmlns:a16="http://schemas.microsoft.com/office/drawing/2014/main" id="{83DBE692-9EB6-C66A-5BAA-B53A08687C56}"/>
-              </a:ext>
-            </a:extLst>
-          </p:cNvPr>
-          <p:cNvGrpSpPr/>
-          <p:nvPr/>
-        </p:nvGrpSpPr>
-        <p:grpSpPr>
-          <a:xfrm>
-            <a:off x="16916400" y="12645762"/>
-            <a:ext cx="10058400" cy="5486400"/>
-            <a:chOff x="1924050" y="5572720"/>
-            <a:chExt cx="6362700" cy="5296585"/>
-          </a:xfrm>
-        </p:grpSpPr>
-        <p:sp>
-          <p:nvSpPr>
-            <p:cNvPr id="1031" name="Rectangle 1030">
-              <a:extLst>
-                <a:ext uri="{FF2B5EF4-FFF2-40B4-BE49-F238E27FC236}">
-                  <a16:creationId xmlns:a16="http://schemas.microsoft.com/office/drawing/2014/main" id="{D066E2A1-CAB9-3732-1D36-A82F4235ABBE}"/>
-                </a:ext>
-              </a:extLst>
-            </p:cNvPr>
-            <p:cNvSpPr/>
-            <p:nvPr/>
-          </p:nvSpPr>
-          <p:spPr>
-            <a:xfrm>
-              <a:off x="1924050" y="5572720"/>
-              <a:ext cx="6362700" cy="923330"/>
-            </a:xfrm>
-            <a:prstGeom prst="rect">
-              <a:avLst/>
-            </a:prstGeom>
-            <a:solidFill>
-              <a:schemeClr val="accent1">
-                <a:lumMod val="50000"/>
-              </a:schemeClr>
-            </a:solidFill>
-          </p:spPr>
-          <p:style>
-            <a:lnRef idx="2">
-              <a:schemeClr val="accent1">
-                <a:shade val="15000"/>
-              </a:schemeClr>
-            </a:lnRef>
-            <a:fillRef idx="1">
-              <a:schemeClr val="accent1"/>
-            </a:fillRef>
-            <a:effectRef idx="0">
-              <a:schemeClr val="accent1"/>
-            </a:effectRef>
-            <a:fontRef idx="minor">
-              <a:schemeClr val="lt1"/>
-            </a:fontRef>
-          </p:style>
-          <p:txBody>
-            <a:bodyPr rtlCol="0" anchor="ctr"/>
-            <a:lstStyle/>
-            <a:p>
-              <a:pPr algn="ctr"/>
-              <a:r>
-                <a:rPr lang="en-US" sz="5400" dirty="0">
-                  <a:latin typeface="Helvetica" panose="020B0604020202020204" pitchFamily="34" charset="0"/>
-                  <a:cs typeface="Helvetica" panose="020B0604020202020204" pitchFamily="34" charset="0"/>
-                </a:rPr>
-                <a:t>Data/Results 2</a:t>
-              </a:r>
-            </a:p>
-          </p:txBody>
-        </p:sp>
-        <p:sp>
-          <p:nvSpPr>
-            <p:cNvPr id="1032" name="Rectangle 1031">
-              <a:extLst>
-                <a:ext uri="{FF2B5EF4-FFF2-40B4-BE49-F238E27FC236}">
-                  <a16:creationId xmlns:a16="http://schemas.microsoft.com/office/drawing/2014/main" id="{F96EADC0-21CD-C13B-10D4-DEAFDB7A264F}"/>
-                </a:ext>
-              </a:extLst>
-            </p:cNvPr>
-            <p:cNvSpPr/>
-            <p:nvPr/>
-          </p:nvSpPr>
-          <p:spPr>
-            <a:xfrm>
-              <a:off x="1924050" y="5649605"/>
-              <a:ext cx="6362700" cy="5219700"/>
-            </a:xfrm>
-            <a:prstGeom prst="rect">
-              <a:avLst/>
-            </a:prstGeom>
-            <a:noFill/>
-            <a:ln>
-              <a:solidFill>
-                <a:schemeClr val="tx2">
-                  <a:lumMod val="50000"/>
-                </a:schemeClr>
-              </a:solidFill>
-            </a:ln>
-          </p:spPr>
-          <p:style>
-            <a:lnRef idx="2">
-              <a:schemeClr val="accent1">
-                <a:shade val="15000"/>
-              </a:schemeClr>
-            </a:lnRef>
-            <a:fillRef idx="1">
-              <a:schemeClr val="accent1"/>
-            </a:fillRef>
-            <a:effectRef idx="0">
-              <a:schemeClr val="accent1"/>
-            </a:effectRef>
-            <a:fontRef idx="minor">
-              <a:schemeClr val="lt1"/>
-            </a:fontRef>
-          </p:style>
-          <p:txBody>
-            <a:bodyPr rtlCol="0" anchor="ctr"/>
-            <a:lstStyle/>
-            <a:p>
-              <a:pPr algn="ctr"/>
-              <a:endParaRPr lang="en-US"/>
+              <a:endParaRPr lang="en-US" dirty="0"/>
             </a:p>
           </p:txBody>
         </p:sp>
@@ -5309,8 +4845,8 @@
         </p:nvGrpSpPr>
         <p:grpSpPr>
           <a:xfrm>
-            <a:off x="16916400" y="20272636"/>
-            <a:ext cx="10058400" cy="5486400"/>
+            <a:off x="17141989" y="20521227"/>
+            <a:ext cx="11902241" cy="9100520"/>
             <a:chOff x="1924050" y="5572720"/>
             <a:chExt cx="6362700" cy="5296585"/>
           </a:xfrm>
@@ -5367,7 +4903,7 @@
                   <a:latin typeface="Helvetica" panose="020B0604020202020204" pitchFamily="34" charset="0"/>
                   <a:cs typeface="Helvetica" panose="020B0604020202020204" pitchFamily="34" charset="0"/>
                 </a:rPr>
-                <a:t>Data/Results 3</a:t>
+                <a:t>Dotplot summary</a:t>
               </a:r>
             </a:p>
           </p:txBody>
@@ -5378,138 +4914,6 @@
               <a:extLst>
                 <a:ext uri="{FF2B5EF4-FFF2-40B4-BE49-F238E27FC236}">
                   <a16:creationId xmlns:a16="http://schemas.microsoft.com/office/drawing/2014/main" id="{877C3F3A-046A-07C7-BC26-FCD36D61BB84}"/>
-                </a:ext>
-              </a:extLst>
-            </p:cNvPr>
-            <p:cNvSpPr/>
-            <p:nvPr/>
-          </p:nvSpPr>
-          <p:spPr>
-            <a:xfrm>
-              <a:off x="1924050" y="5649605"/>
-              <a:ext cx="6362700" cy="5219700"/>
-            </a:xfrm>
-            <a:prstGeom prst="rect">
-              <a:avLst/>
-            </a:prstGeom>
-            <a:noFill/>
-            <a:ln>
-              <a:solidFill>
-                <a:schemeClr val="tx2">
-                  <a:lumMod val="50000"/>
-                </a:schemeClr>
-              </a:solidFill>
-            </a:ln>
-          </p:spPr>
-          <p:style>
-            <a:lnRef idx="2">
-              <a:schemeClr val="accent1">
-                <a:shade val="15000"/>
-              </a:schemeClr>
-            </a:lnRef>
-            <a:fillRef idx="1">
-              <a:schemeClr val="accent1"/>
-            </a:fillRef>
-            <a:effectRef idx="0">
-              <a:schemeClr val="accent1"/>
-            </a:effectRef>
-            <a:fontRef idx="minor">
-              <a:schemeClr val="lt1"/>
-            </a:fontRef>
-          </p:style>
-          <p:txBody>
-            <a:bodyPr rtlCol="0" anchor="ctr"/>
-            <a:lstStyle/>
-            <a:p>
-              <a:pPr algn="ctr"/>
-              <a:endParaRPr lang="en-US"/>
-            </a:p>
-          </p:txBody>
-        </p:sp>
-      </p:grpSp>
-      <p:grpSp>
-        <p:nvGrpSpPr>
-          <p:cNvPr id="1036" name="Group 1035">
-            <a:extLst>
-              <a:ext uri="{FF2B5EF4-FFF2-40B4-BE49-F238E27FC236}">
-                <a16:creationId xmlns:a16="http://schemas.microsoft.com/office/drawing/2014/main" id="{0C7B189B-8830-2A23-7363-3BA405CCB1F4}"/>
-              </a:ext>
-            </a:extLst>
-          </p:cNvPr>
-          <p:cNvGrpSpPr/>
-          <p:nvPr/>
-        </p:nvGrpSpPr>
-        <p:grpSpPr>
-          <a:xfrm>
-            <a:off x="32042100" y="5624214"/>
-            <a:ext cx="10058400" cy="5486400"/>
-            <a:chOff x="1924050" y="5572720"/>
-            <a:chExt cx="6362700" cy="5296585"/>
-          </a:xfrm>
-        </p:grpSpPr>
-        <p:sp>
-          <p:nvSpPr>
-            <p:cNvPr id="1037" name="Rectangle 1036">
-              <a:extLst>
-                <a:ext uri="{FF2B5EF4-FFF2-40B4-BE49-F238E27FC236}">
-                  <a16:creationId xmlns:a16="http://schemas.microsoft.com/office/drawing/2014/main" id="{F91A9106-0AE3-EB2E-46EA-A4E2386BE491}"/>
-                </a:ext>
-              </a:extLst>
-            </p:cNvPr>
-            <p:cNvSpPr/>
-            <p:nvPr/>
-          </p:nvSpPr>
-          <p:spPr>
-            <a:xfrm>
-              <a:off x="1924050" y="5572720"/>
-              <a:ext cx="6362700" cy="923330"/>
-            </a:xfrm>
-            <a:prstGeom prst="rect">
-              <a:avLst/>
-            </a:prstGeom>
-            <a:solidFill>
-              <a:schemeClr val="accent1">
-                <a:lumMod val="50000"/>
-              </a:schemeClr>
-            </a:solidFill>
-          </p:spPr>
-          <p:style>
-            <a:lnRef idx="2">
-              <a:schemeClr val="accent1">
-                <a:shade val="15000"/>
-              </a:schemeClr>
-            </a:lnRef>
-            <a:fillRef idx="1">
-              <a:schemeClr val="accent1"/>
-            </a:fillRef>
-            <a:effectRef idx="0">
-              <a:schemeClr val="accent1"/>
-            </a:effectRef>
-            <a:fontRef idx="minor">
-              <a:schemeClr val="lt1"/>
-            </a:fontRef>
-          </p:style>
-          <p:txBody>
-            <a:bodyPr rtlCol="0" anchor="ctr"/>
-            <a:lstStyle/>
-            <a:p>
-              <a:pPr algn="ctr"/>
-              <a:r>
-                <a:rPr lang="en-US" sz="5400" dirty="0">
-                  <a:latin typeface="Helvetica" panose="020B0604020202020204" pitchFamily="34" charset="0"/>
-                  <a:cs typeface="Helvetica" panose="020B0604020202020204" pitchFamily="34" charset="0"/>
-                </a:rPr>
-                <a:t>Conclusions</a:t>
-              </a:r>
-            </a:p>
-          </p:txBody>
-        </p:sp>
-        <p:sp>
-          <p:nvSpPr>
-            <p:cNvPr id="1038" name="Rectangle 1037">
-              <a:extLst>
-                <a:ext uri="{FF2B5EF4-FFF2-40B4-BE49-F238E27FC236}">
-                  <a16:creationId xmlns:a16="http://schemas.microsoft.com/office/drawing/2014/main" id="{9F1EC27A-715B-9CA3-78A8-B0A5C954FF45}"/>
                 </a:ext>
               </a:extLst>
             </p:cNvPr>
@@ -5573,8 +4977,8 @@
         </p:nvGrpSpPr>
         <p:grpSpPr>
           <a:xfrm>
-            <a:off x="32042100" y="12645762"/>
-            <a:ext cx="10058400" cy="5486400"/>
+            <a:off x="30764742" y="20053325"/>
+            <a:ext cx="12356436" cy="5828282"/>
             <a:chOff x="1924050" y="5572720"/>
             <a:chExt cx="6362700" cy="5296585"/>
           </a:xfrm>
@@ -5705,7 +5109,7 @@
         </p:nvGrpSpPr>
         <p:grpSpPr>
           <a:xfrm>
-            <a:off x="32042100" y="20272636"/>
+            <a:off x="32860248" y="26817815"/>
             <a:ext cx="10058400" cy="5486400"/>
             <a:chOff x="1924050" y="5572720"/>
             <a:chExt cx="6362700" cy="5296585"/>
@@ -5823,6 +5227,1808 @@
           </p:txBody>
         </p:sp>
       </p:grpSp>
+      <p:sp>
+        <p:nvSpPr>
+          <p:cNvPr id="4" name="TextBox 3">
+            <a:extLst>
+              <a:ext uri="{FF2B5EF4-FFF2-40B4-BE49-F238E27FC236}">
+                <a16:creationId xmlns:a16="http://schemas.microsoft.com/office/drawing/2014/main" id="{866EA666-48D4-ED57-9E6F-5CB18B84230A}"/>
+              </a:ext>
+            </a:extLst>
+          </p:cNvPr>
+          <p:cNvSpPr txBox="1"/>
+          <p:nvPr/>
+        </p:nvSpPr>
+        <p:spPr>
+          <a:xfrm>
+            <a:off x="2077451" y="5464712"/>
+            <a:ext cx="13893216" cy="8956298"/>
+          </a:xfrm>
+          <a:prstGeom prst="rect">
+            <a:avLst/>
+          </a:prstGeom>
+          <a:noFill/>
+        </p:spPr>
+        <p:txBody>
+          <a:bodyPr wrap="square" rtlCol="0">
+            <a:spAutoFit/>
+          </a:bodyPr>
+          <a:lstStyle/>
+          <a:p>
+            <a:pPr marL="285750" indent="-285750">
+              <a:buFont typeface="Arial" panose="020B0604020202020204" pitchFamily="34" charset="0"/>
+              <a:buChar char="•"/>
+            </a:pPr>
+            <a:r>
+              <a:rPr lang="en-US" sz="3600" dirty="0">
+                <a:latin typeface="Helvetica" panose="020B0604020202020204" pitchFamily="34" charset="0"/>
+                <a:cs typeface="Helvetica" panose="020B0604020202020204" pitchFamily="34" charset="0"/>
+              </a:rPr>
+              <a:t>Cancer-testes genes (CTGs refer to genes that are expressed only in germ cells under normal physiological conditions, that may be reactivated during tumorigenesis, making them good candidates for oncogenes</a:t>
+            </a:r>
+            <a:r>
+              <a:rPr lang="en-US" sz="3600" baseline="30000" dirty="0">
+                <a:latin typeface="Helvetica" panose="020B0604020202020204" pitchFamily="34" charset="0"/>
+                <a:cs typeface="Helvetica" panose="020B0604020202020204" pitchFamily="34" charset="0"/>
+              </a:rPr>
+              <a:t>1</a:t>
+            </a:r>
+            <a:endParaRPr lang="en-US" sz="3600" dirty="0">
+              <a:latin typeface="Helvetica" panose="020B0604020202020204" pitchFamily="34" charset="0"/>
+              <a:cs typeface="Helvetica" panose="020B0604020202020204" pitchFamily="34" charset="0"/>
+            </a:endParaRPr>
+          </a:p>
+          <a:p>
+            <a:pPr marL="285750" indent="-285750">
+              <a:buFont typeface="Arial" panose="020B0604020202020204" pitchFamily="34" charset="0"/>
+              <a:buChar char="•"/>
+            </a:pPr>
+            <a:r>
+              <a:rPr lang="en-US" sz="3600" dirty="0">
+                <a:latin typeface="Helvetica" panose="020B0604020202020204" pitchFamily="34" charset="0"/>
+                <a:cs typeface="Helvetica" panose="020B0604020202020204" pitchFamily="34" charset="0"/>
+              </a:rPr>
+              <a:t>The gene products of CTGs are referred to as cancer-testis antigens (CTAs) and they may be good candidates for therapy due to their restricted expression in normal tissues and their immunogenicity</a:t>
+            </a:r>
+            <a:r>
+              <a:rPr lang="en-US" sz="3600" baseline="30000" dirty="0">
+                <a:latin typeface="Helvetica" panose="020B0604020202020204" pitchFamily="34" charset="0"/>
+                <a:cs typeface="Helvetica" panose="020B0604020202020204" pitchFamily="34" charset="0"/>
+              </a:rPr>
+              <a:t>1</a:t>
+            </a:r>
+            <a:endParaRPr lang="en-US" sz="3600" dirty="0">
+              <a:latin typeface="Helvetica" panose="020B0604020202020204" pitchFamily="34" charset="0"/>
+              <a:cs typeface="Helvetica" panose="020B0604020202020204" pitchFamily="34" charset="0"/>
+            </a:endParaRPr>
+          </a:p>
+          <a:p>
+            <a:pPr marL="285750" indent="-285750">
+              <a:buFont typeface="Arial" panose="020B0604020202020204" pitchFamily="34" charset="0"/>
+              <a:buChar char="•"/>
+            </a:pPr>
+            <a:r>
+              <a:rPr lang="en-US" sz="3600" dirty="0">
+                <a:latin typeface="Helvetica" panose="020B0604020202020204" pitchFamily="34" charset="0"/>
+                <a:cs typeface="Helvetica" panose="020B0604020202020204" pitchFamily="34" charset="0"/>
+              </a:rPr>
+              <a:t>A number of CTGs are known to be aberrantly expressed in ovarian cancer, including AKAP3, AKAP4, BAGE, CTCFL, CT45, GAGE1/2, HOM-TES-85, HORMAD1, HSP70-2, LAGE-1, MAGE-A1, MAGE-A2, MAGE-A3, MAGE-A9, MAGE-A10, MAGE-C1, NY-ESO-1, OY-TES-1, PRAME, PASD1, PIWIL2, PIWIL3, PIWIL4, PLU-1, PLAC1, SPAG9, SCP-1, SP17, SSX2, SSX1, SSX4, TAG-1, TAG-2a, TAG-2b, TAG2c, TRAG-3</a:t>
+            </a:r>
+            <a:r>
+              <a:rPr lang="en-US" sz="3600" baseline="30000" dirty="0">
+                <a:latin typeface="Helvetica" panose="020B0604020202020204" pitchFamily="34" charset="0"/>
+                <a:cs typeface="Helvetica" panose="020B0604020202020204" pitchFamily="34" charset="0"/>
+              </a:rPr>
+              <a:t>2</a:t>
+            </a:r>
+            <a:endParaRPr lang="en-US" sz="3600" dirty="0">
+              <a:latin typeface="Helvetica" panose="020B0604020202020204" pitchFamily="34" charset="0"/>
+              <a:cs typeface="Helvetica" panose="020B0604020202020204" pitchFamily="34" charset="0"/>
+            </a:endParaRPr>
+          </a:p>
+          <a:p>
+            <a:pPr marL="285750" indent="-285750">
+              <a:buFont typeface="Arial" panose="020B0604020202020204" pitchFamily="34" charset="0"/>
+              <a:buChar char="•"/>
+            </a:pPr>
+            <a:endParaRPr lang="en-US" sz="3600" dirty="0">
+              <a:latin typeface="Helvetica" panose="020B0604020202020204" pitchFamily="34" charset="0"/>
+              <a:cs typeface="Helvetica" panose="020B0604020202020204" pitchFamily="34" charset="0"/>
+            </a:endParaRPr>
+          </a:p>
+        </p:txBody>
+      </p:sp>
+      <p:grpSp>
+        <p:nvGrpSpPr>
+          <p:cNvPr id="36" name="Group 35">
+            <a:extLst>
+              <a:ext uri="{FF2B5EF4-FFF2-40B4-BE49-F238E27FC236}">
+                <a16:creationId xmlns:a16="http://schemas.microsoft.com/office/drawing/2014/main" id="{F761740F-87B9-78B6-D1DF-BD19DA9EB055}"/>
+              </a:ext>
+            </a:extLst>
+          </p:cNvPr>
+          <p:cNvGrpSpPr/>
+          <p:nvPr/>
+        </p:nvGrpSpPr>
+        <p:grpSpPr>
+          <a:xfrm>
+            <a:off x="1600698" y="18442916"/>
+            <a:ext cx="13796714" cy="9247165"/>
+            <a:chOff x="1625765" y="17340457"/>
+            <a:chExt cx="13796714" cy="9247165"/>
+          </a:xfrm>
+        </p:grpSpPr>
+        <p:grpSp>
+          <p:nvGrpSpPr>
+            <p:cNvPr id="35" name="Group 34">
+              <a:extLst>
+                <a:ext uri="{FF2B5EF4-FFF2-40B4-BE49-F238E27FC236}">
+                  <a16:creationId xmlns:a16="http://schemas.microsoft.com/office/drawing/2014/main" id="{D8C13E18-91A7-F595-C7C1-390B118EA51D}"/>
+                </a:ext>
+              </a:extLst>
+            </p:cNvPr>
+            <p:cNvGrpSpPr/>
+            <p:nvPr/>
+          </p:nvGrpSpPr>
+          <p:grpSpPr>
+            <a:xfrm>
+              <a:off x="1625765" y="17340457"/>
+              <a:ext cx="13563602" cy="8626008"/>
+              <a:chOff x="1625765" y="17340457"/>
+              <a:chExt cx="13563602" cy="8626008"/>
+            </a:xfrm>
+          </p:grpSpPr>
+          <p:sp>
+            <p:nvSpPr>
+              <p:cNvPr id="28" name="Rectangle 27">
+                <a:extLst>
+                  <a:ext uri="{FF2B5EF4-FFF2-40B4-BE49-F238E27FC236}">
+                    <a16:creationId xmlns:a16="http://schemas.microsoft.com/office/drawing/2014/main" id="{F82C016C-1097-DEA1-930D-A5E849C48A6B}"/>
+                  </a:ext>
+                </a:extLst>
+              </p:cNvPr>
+              <p:cNvSpPr/>
+              <p:nvPr/>
+            </p:nvSpPr>
+            <p:spPr>
+              <a:xfrm>
+                <a:off x="1625765" y="17340457"/>
+                <a:ext cx="13563602" cy="1516430"/>
+              </a:xfrm>
+              <a:prstGeom prst="rect">
+                <a:avLst/>
+              </a:prstGeom>
+              <a:solidFill>
+                <a:schemeClr val="accent1">
+                  <a:lumMod val="50000"/>
+                </a:schemeClr>
+              </a:solidFill>
+            </p:spPr>
+            <p:style>
+              <a:lnRef idx="2">
+                <a:schemeClr val="accent1">
+                  <a:shade val="15000"/>
+                </a:schemeClr>
+              </a:lnRef>
+              <a:fillRef idx="1">
+                <a:schemeClr val="accent1"/>
+              </a:fillRef>
+              <a:effectRef idx="0">
+                <a:schemeClr val="accent1"/>
+              </a:effectRef>
+              <a:fontRef idx="minor">
+                <a:schemeClr val="lt1"/>
+              </a:fontRef>
+            </p:style>
+            <p:txBody>
+              <a:bodyPr rtlCol="0" anchor="ctr"/>
+              <a:lstStyle/>
+              <a:p>
+                <a:pPr algn="ctr"/>
+                <a:r>
+                  <a:rPr lang="en-US" sz="5400" dirty="0">
+                    <a:latin typeface="Helvetica" panose="020B0604020202020204" pitchFamily="34" charset="0"/>
+                    <a:cs typeface="Helvetica" panose="020B0604020202020204" pitchFamily="34" charset="0"/>
+                  </a:rPr>
+                  <a:t>Methods</a:t>
+                </a:r>
+              </a:p>
+            </p:txBody>
+          </p:sp>
+          <p:sp>
+            <p:nvSpPr>
+              <p:cNvPr id="29" name="Rectangle 28">
+                <a:extLst>
+                  <a:ext uri="{FF2B5EF4-FFF2-40B4-BE49-F238E27FC236}">
+                    <a16:creationId xmlns:a16="http://schemas.microsoft.com/office/drawing/2014/main" id="{9AA7E6DA-EBF8-5577-1E67-391B4AB9F41C}"/>
+                  </a:ext>
+                </a:extLst>
+              </p:cNvPr>
+              <p:cNvSpPr/>
+              <p:nvPr/>
+            </p:nvSpPr>
+            <p:spPr>
+              <a:xfrm>
+                <a:off x="1625766" y="18185511"/>
+                <a:ext cx="13563601" cy="7780954"/>
+              </a:xfrm>
+              <a:prstGeom prst="rect">
+                <a:avLst/>
+              </a:prstGeom>
+              <a:noFill/>
+              <a:ln>
+                <a:solidFill>
+                  <a:schemeClr val="tx2">
+                    <a:lumMod val="50000"/>
+                  </a:schemeClr>
+                </a:solidFill>
+              </a:ln>
+            </p:spPr>
+            <p:style>
+              <a:lnRef idx="2">
+                <a:schemeClr val="accent1">
+                  <a:shade val="15000"/>
+                </a:schemeClr>
+              </a:lnRef>
+              <a:fillRef idx="1">
+                <a:schemeClr val="accent1"/>
+              </a:fillRef>
+              <a:effectRef idx="0">
+                <a:schemeClr val="accent1"/>
+              </a:effectRef>
+              <a:fontRef idx="minor">
+                <a:schemeClr val="lt1"/>
+              </a:fontRef>
+            </p:style>
+            <p:txBody>
+              <a:bodyPr rtlCol="0" anchor="ctr"/>
+              <a:lstStyle/>
+              <a:p>
+                <a:pPr algn="ctr"/>
+                <a:endParaRPr lang="en-US"/>
+              </a:p>
+            </p:txBody>
+          </p:sp>
+        </p:grpSp>
+        <p:sp>
+          <p:nvSpPr>
+            <p:cNvPr id="6" name="TextBox 5">
+              <a:extLst>
+                <a:ext uri="{FF2B5EF4-FFF2-40B4-BE49-F238E27FC236}">
+                  <a16:creationId xmlns:a16="http://schemas.microsoft.com/office/drawing/2014/main" id="{19706653-796E-5BA5-9553-5B2133B6BB9C}"/>
+                </a:ext>
+              </a:extLst>
+            </p:cNvPr>
+            <p:cNvSpPr txBox="1"/>
+            <p:nvPr/>
+          </p:nvSpPr>
+          <p:spPr>
+            <a:xfrm>
+              <a:off x="1790699" y="19293317"/>
+              <a:ext cx="13631780" cy="7294305"/>
+            </a:xfrm>
+            <a:prstGeom prst="rect">
+              <a:avLst/>
+            </a:prstGeom>
+            <a:noFill/>
+          </p:spPr>
+          <p:txBody>
+            <a:bodyPr wrap="square" rtlCol="0">
+              <a:spAutoFit/>
+            </a:bodyPr>
+            <a:lstStyle/>
+            <a:p>
+              <a:pPr marL="285750" indent="-285750">
+                <a:buFont typeface="Arial" panose="020B0604020202020204" pitchFamily="34" charset="0"/>
+                <a:buChar char="•"/>
+              </a:pPr>
+              <a:r>
+                <a:rPr lang="en-US" sz="3600" dirty="0">
+                  <a:latin typeface="Helvetica" panose="020B0604020202020204" pitchFamily="34" charset="0"/>
+                  <a:cs typeface="Helvetica" panose="020B0604020202020204" pitchFamily="34" charset="0"/>
+                </a:rPr>
+                <a:t>Publicly available </a:t>
+              </a:r>
+              <a:r>
+                <a:rPr lang="en-US" sz="3600" dirty="0" err="1">
+                  <a:latin typeface="Helvetica" panose="020B0604020202020204" pitchFamily="34" charset="0"/>
+                  <a:cs typeface="Helvetica" panose="020B0604020202020204" pitchFamily="34" charset="0"/>
+                </a:rPr>
+                <a:t>scRNAseq</a:t>
+              </a:r>
+              <a:r>
+                <a:rPr lang="en-US" sz="3600" dirty="0">
+                  <a:latin typeface="Helvetica" panose="020B0604020202020204" pitchFamily="34" charset="0"/>
+                  <a:cs typeface="Helvetica" panose="020B0604020202020204" pitchFamily="34" charset="0"/>
+                </a:rPr>
+                <a:t> datasets were obtained from GEO (GSE86146, GSE181558) containing male and female embryonic cells and fetal cells, from both first and second trimester</a:t>
+              </a:r>
+            </a:p>
+            <a:p>
+              <a:pPr marL="285750" indent="-285750">
+                <a:buFont typeface="Arial" panose="020B0604020202020204" pitchFamily="34" charset="0"/>
+                <a:buChar char="•"/>
+              </a:pPr>
+              <a:r>
+                <a:rPr lang="en-US" sz="3600" dirty="0">
+                  <a:latin typeface="Helvetica" panose="020B0604020202020204" pitchFamily="34" charset="0"/>
+                  <a:cs typeface="Helvetica" panose="020B0604020202020204" pitchFamily="34" charset="0"/>
+                </a:rPr>
+                <a:t>The data was processed with </a:t>
+              </a:r>
+              <a:r>
+                <a:rPr lang="en-US" sz="3600" dirty="0" err="1">
+                  <a:latin typeface="Helvetica" panose="020B0604020202020204" pitchFamily="34" charset="0"/>
+                  <a:cs typeface="Helvetica" panose="020B0604020202020204" pitchFamily="34" charset="0"/>
+                </a:rPr>
+                <a:t>Scanpy</a:t>
+              </a:r>
+              <a:r>
+                <a:rPr lang="en-US" sz="3600" dirty="0">
+                  <a:latin typeface="Helvetica" panose="020B0604020202020204" pitchFamily="34" charset="0"/>
+                  <a:cs typeface="Helvetica" panose="020B0604020202020204" pitchFamily="34" charset="0"/>
+                </a:rPr>
+                <a:t>. Cells were filtered based on gene counts, total counts and mitochondrial content. The data was normalized, log-transformed and highly variable genes were identified. PCA, UMAP and Leiden clustering were used for dimensionality reduction and cell population identification</a:t>
+              </a:r>
+            </a:p>
+            <a:p>
+              <a:pPr marL="285750" indent="-285750">
+                <a:buFont typeface="Arial" panose="020B0604020202020204" pitchFamily="34" charset="0"/>
+                <a:buChar char="•"/>
+              </a:pPr>
+              <a:r>
+                <a:rPr lang="en-US" sz="3600" dirty="0">
+                  <a:latin typeface="Helvetica" panose="020B0604020202020204" pitchFamily="34" charset="0"/>
+                  <a:cs typeface="Helvetica" panose="020B0604020202020204" pitchFamily="34" charset="0"/>
+                </a:rPr>
+                <a:t>The database CellMarker2.0 and known marker genes were used to annotate and refine cell type annotations  </a:t>
+              </a:r>
+            </a:p>
+            <a:p>
+              <a:pPr marL="285750" indent="-285750">
+                <a:buFont typeface="Arial" panose="020B0604020202020204" pitchFamily="34" charset="0"/>
+                <a:buChar char="•"/>
+              </a:pPr>
+              <a:endParaRPr lang="en-US" sz="3600" dirty="0">
+                <a:latin typeface="Helvetica" panose="020B0604020202020204" pitchFamily="34" charset="0"/>
+                <a:cs typeface="Helvetica" panose="020B0604020202020204" pitchFamily="34" charset="0"/>
+              </a:endParaRPr>
+            </a:p>
+            <a:p>
+              <a:pPr marL="285750" indent="-285750">
+                <a:buFont typeface="Arial" panose="020B0604020202020204" pitchFamily="34" charset="0"/>
+                <a:buChar char="•"/>
+              </a:pPr>
+              <a:endParaRPr lang="en-US" sz="3600" dirty="0">
+                <a:latin typeface="Helvetica" panose="020B0604020202020204" pitchFamily="34" charset="0"/>
+                <a:cs typeface="Helvetica" panose="020B0604020202020204" pitchFamily="34" charset="0"/>
+              </a:endParaRPr>
+            </a:p>
+          </p:txBody>
+        </p:sp>
+      </p:grpSp>
+      <p:pic>
+        <p:nvPicPr>
+          <p:cNvPr id="1026" name="Picture 2">
+            <a:extLst>
+              <a:ext uri="{FF2B5EF4-FFF2-40B4-BE49-F238E27FC236}">
+                <a16:creationId xmlns:a16="http://schemas.microsoft.com/office/drawing/2014/main" id="{E06D6BE3-D948-45DC-CC9E-CC8981A0CF2D}"/>
+              </a:ext>
+            </a:extLst>
+          </p:cNvPr>
+          <p:cNvPicPr>
+            <a:picLocks noChangeAspect="1" noChangeArrowheads="1"/>
+          </p:cNvPicPr>
+          <p:nvPr/>
+        </p:nvPicPr>
+        <p:blipFill>
+          <a:blip r:embed="rId3">
+            <a:extLst>
+              <a:ext uri="{28A0092B-C50C-407E-A947-70E740481C1C}">
+                <a14:useLocalDpi xmlns:a14="http://schemas.microsoft.com/office/drawing/2010/main" val="0"/>
+              </a:ext>
+            </a:extLst>
+          </a:blip>
+          <a:srcRect/>
+          <a:stretch/>
+        </p:blipFill>
+        <p:spPr bwMode="auto">
+          <a:xfrm>
+            <a:off x="17141989" y="22841030"/>
+            <a:ext cx="12797589" cy="6030442"/>
+          </a:xfrm>
+          <a:prstGeom prst="rect">
+            <a:avLst/>
+          </a:prstGeom>
+          <a:noFill/>
+          <a:extLst>
+            <a:ext uri="{909E8E84-426E-40DD-AFC4-6F175D3DCCD1}">
+              <a14:hiddenFill xmlns:a14="http://schemas.microsoft.com/office/drawing/2010/main">
+                <a:solidFill>
+                  <a:srgbClr val="FFFFFF"/>
+                </a:solidFill>
+              </a14:hiddenFill>
+            </a:ext>
+          </a:extLst>
+        </p:spPr>
+      </p:pic>
+      <p:grpSp>
+        <p:nvGrpSpPr>
+          <p:cNvPr id="42" name="Group 41">
+            <a:extLst>
+              <a:ext uri="{FF2B5EF4-FFF2-40B4-BE49-F238E27FC236}">
+                <a16:creationId xmlns:a16="http://schemas.microsoft.com/office/drawing/2014/main" id="{DB013431-ED07-DBB3-3A5D-F58C98B2D6AC}"/>
+              </a:ext>
+            </a:extLst>
+          </p:cNvPr>
+          <p:cNvGrpSpPr/>
+          <p:nvPr/>
+        </p:nvGrpSpPr>
+        <p:grpSpPr>
+          <a:xfrm>
+            <a:off x="17141991" y="3523745"/>
+            <a:ext cx="10778543" cy="6895601"/>
+            <a:chOff x="17141991" y="3523745"/>
+            <a:chExt cx="10778543" cy="6895601"/>
+          </a:xfrm>
+        </p:grpSpPr>
+        <p:grpSp>
+          <p:nvGrpSpPr>
+            <p:cNvPr id="1027" name="Group 1026">
+              <a:extLst>
+                <a:ext uri="{FF2B5EF4-FFF2-40B4-BE49-F238E27FC236}">
+                  <a16:creationId xmlns:a16="http://schemas.microsoft.com/office/drawing/2014/main" id="{5DA42DF9-81E2-AD77-5510-091E9500CC57}"/>
+                </a:ext>
+              </a:extLst>
+            </p:cNvPr>
+            <p:cNvGrpSpPr/>
+            <p:nvPr/>
+          </p:nvGrpSpPr>
+          <p:grpSpPr>
+            <a:xfrm>
+              <a:off x="17141991" y="3523745"/>
+              <a:ext cx="10778543" cy="6895601"/>
+              <a:chOff x="1924050" y="5572720"/>
+              <a:chExt cx="6362700" cy="5296585"/>
+            </a:xfrm>
+          </p:grpSpPr>
+          <p:sp>
+            <p:nvSpPr>
+              <p:cNvPr id="1028" name="Rectangle 1027">
+                <a:extLst>
+                  <a:ext uri="{FF2B5EF4-FFF2-40B4-BE49-F238E27FC236}">
+                    <a16:creationId xmlns:a16="http://schemas.microsoft.com/office/drawing/2014/main" id="{B5AC9B94-4300-6A21-147E-076B6F2E2677}"/>
+                  </a:ext>
+                </a:extLst>
+              </p:cNvPr>
+              <p:cNvSpPr/>
+              <p:nvPr/>
+            </p:nvSpPr>
+            <p:spPr>
+              <a:xfrm>
+                <a:off x="1924050" y="5572720"/>
+                <a:ext cx="6362700" cy="923330"/>
+              </a:xfrm>
+              <a:prstGeom prst="rect">
+                <a:avLst/>
+              </a:prstGeom>
+              <a:solidFill>
+                <a:schemeClr val="accent1">
+                  <a:lumMod val="50000"/>
+                </a:schemeClr>
+              </a:solidFill>
+            </p:spPr>
+            <p:style>
+              <a:lnRef idx="2">
+                <a:schemeClr val="accent1">
+                  <a:shade val="15000"/>
+                </a:schemeClr>
+              </a:lnRef>
+              <a:fillRef idx="1">
+                <a:schemeClr val="accent1"/>
+              </a:fillRef>
+              <a:effectRef idx="0">
+                <a:schemeClr val="accent1"/>
+              </a:effectRef>
+              <a:fontRef idx="minor">
+                <a:schemeClr val="lt1"/>
+              </a:fontRef>
+            </p:style>
+            <p:txBody>
+              <a:bodyPr rtlCol="0" anchor="ctr"/>
+              <a:lstStyle/>
+              <a:p>
+                <a:pPr algn="ctr"/>
+                <a:r>
+                  <a:rPr lang="en-US" sz="5400" dirty="0">
+                    <a:latin typeface="Helvetica" panose="020B0604020202020204" pitchFamily="34" charset="0"/>
+                    <a:cs typeface="Helvetica" panose="020B0604020202020204" pitchFamily="34" charset="0"/>
+                  </a:rPr>
+                  <a:t>UMAP of cell types</a:t>
+                </a:r>
+              </a:p>
+            </p:txBody>
+          </p:sp>
+          <p:sp>
+            <p:nvSpPr>
+              <p:cNvPr id="1029" name="Rectangle 1028">
+                <a:extLst>
+                  <a:ext uri="{FF2B5EF4-FFF2-40B4-BE49-F238E27FC236}">
+                    <a16:creationId xmlns:a16="http://schemas.microsoft.com/office/drawing/2014/main" id="{8E4A9DA4-8D27-EA74-1FA0-ED41DBD6EBD7}"/>
+                  </a:ext>
+                </a:extLst>
+              </p:cNvPr>
+              <p:cNvSpPr/>
+              <p:nvPr/>
+            </p:nvSpPr>
+            <p:spPr>
+              <a:xfrm>
+                <a:off x="1924050" y="5649605"/>
+                <a:ext cx="6362700" cy="5219700"/>
+              </a:xfrm>
+              <a:prstGeom prst="rect">
+                <a:avLst/>
+              </a:prstGeom>
+              <a:noFill/>
+              <a:ln>
+                <a:solidFill>
+                  <a:schemeClr val="tx2">
+                    <a:lumMod val="50000"/>
+                  </a:schemeClr>
+                </a:solidFill>
+              </a:ln>
+            </p:spPr>
+            <p:style>
+              <a:lnRef idx="2">
+                <a:schemeClr val="accent1">
+                  <a:shade val="15000"/>
+                </a:schemeClr>
+              </a:lnRef>
+              <a:fillRef idx="1">
+                <a:schemeClr val="accent1"/>
+              </a:fillRef>
+              <a:effectRef idx="0">
+                <a:schemeClr val="accent1"/>
+              </a:effectRef>
+              <a:fontRef idx="minor">
+                <a:schemeClr val="lt1"/>
+              </a:fontRef>
+            </p:style>
+            <p:txBody>
+              <a:bodyPr rtlCol="0" anchor="ctr"/>
+              <a:lstStyle/>
+              <a:p>
+                <a:pPr algn="ctr"/>
+                <a:endParaRPr lang="en-US"/>
+              </a:p>
+            </p:txBody>
+          </p:sp>
+        </p:grpSp>
+        <p:pic>
+          <p:nvPicPr>
+            <p:cNvPr id="16" name="Picture 4">
+              <a:extLst>
+                <a:ext uri="{FF2B5EF4-FFF2-40B4-BE49-F238E27FC236}">
+                  <a16:creationId xmlns:a16="http://schemas.microsoft.com/office/drawing/2014/main" id="{0A1B164F-D2C9-6703-1ECF-9C2E76194704}"/>
+                </a:ext>
+              </a:extLst>
+            </p:cNvPr>
+            <p:cNvPicPr>
+              <a:picLocks noChangeAspect="1" noChangeArrowheads="1"/>
+            </p:cNvPicPr>
+            <p:nvPr/>
+          </p:nvPicPr>
+          <p:blipFill>
+            <a:blip r:embed="rId4">
+              <a:extLst>
+                <a:ext uri="{28A0092B-C50C-407E-A947-70E740481C1C}">
+                  <a14:useLocalDpi xmlns:a14="http://schemas.microsoft.com/office/drawing/2010/main" val="0"/>
+                </a:ext>
+              </a:extLst>
+            </a:blip>
+            <a:srcRect/>
+            <a:stretch>
+              <a:fillRect/>
+            </a:stretch>
+          </p:blipFill>
+          <p:spPr bwMode="auto">
+            <a:xfrm>
+              <a:off x="17454812" y="5044744"/>
+              <a:ext cx="10110537" cy="5117834"/>
+            </a:xfrm>
+            <a:prstGeom prst="rect">
+              <a:avLst/>
+            </a:prstGeom>
+            <a:noFill/>
+            <a:extLst>
+              <a:ext uri="{909E8E84-426E-40DD-AFC4-6F175D3DCCD1}">
+                <a14:hiddenFill xmlns:a14="http://schemas.microsoft.com/office/drawing/2010/main">
+                  <a:solidFill>
+                    <a:srgbClr val="FFFFFF"/>
+                  </a:solidFill>
+                </a14:hiddenFill>
+              </a:ext>
+            </a:extLst>
+          </p:spPr>
+        </p:pic>
+      </p:grpSp>
+      <p:grpSp>
+        <p:nvGrpSpPr>
+          <p:cNvPr id="43" name="Group 42">
+            <a:extLst>
+              <a:ext uri="{FF2B5EF4-FFF2-40B4-BE49-F238E27FC236}">
+                <a16:creationId xmlns:a16="http://schemas.microsoft.com/office/drawing/2014/main" id="{50A62C0F-EE03-CEA2-9603-057A520A8C76}"/>
+              </a:ext>
+            </a:extLst>
+          </p:cNvPr>
+          <p:cNvGrpSpPr/>
+          <p:nvPr/>
+        </p:nvGrpSpPr>
+        <p:grpSpPr>
+          <a:xfrm>
+            <a:off x="17141990" y="11128000"/>
+            <a:ext cx="11902241" cy="8432801"/>
+            <a:chOff x="17141990" y="11128000"/>
+            <a:chExt cx="11902241" cy="8432801"/>
+          </a:xfrm>
+        </p:grpSpPr>
+        <p:grpSp>
+          <p:nvGrpSpPr>
+            <p:cNvPr id="1030" name="Group 1029">
+              <a:extLst>
+                <a:ext uri="{FF2B5EF4-FFF2-40B4-BE49-F238E27FC236}">
+                  <a16:creationId xmlns:a16="http://schemas.microsoft.com/office/drawing/2014/main" id="{83DBE692-9EB6-C66A-5BAA-B53A08687C56}"/>
+                </a:ext>
+              </a:extLst>
+            </p:cNvPr>
+            <p:cNvGrpSpPr/>
+            <p:nvPr/>
+          </p:nvGrpSpPr>
+          <p:grpSpPr>
+            <a:xfrm>
+              <a:off x="17141990" y="11128000"/>
+              <a:ext cx="11902241" cy="8432801"/>
+              <a:chOff x="1924050" y="5572720"/>
+              <a:chExt cx="6362700" cy="5296585"/>
+            </a:xfrm>
+          </p:grpSpPr>
+          <p:sp>
+            <p:nvSpPr>
+              <p:cNvPr id="1031" name="Rectangle 1030">
+                <a:extLst>
+                  <a:ext uri="{FF2B5EF4-FFF2-40B4-BE49-F238E27FC236}">
+                    <a16:creationId xmlns:a16="http://schemas.microsoft.com/office/drawing/2014/main" id="{D066E2A1-CAB9-3732-1D36-A82F4235ABBE}"/>
+                  </a:ext>
+                </a:extLst>
+              </p:cNvPr>
+              <p:cNvSpPr/>
+              <p:nvPr/>
+            </p:nvSpPr>
+            <p:spPr>
+              <a:xfrm>
+                <a:off x="1924050" y="5572720"/>
+                <a:ext cx="6362700" cy="923330"/>
+              </a:xfrm>
+              <a:prstGeom prst="rect">
+                <a:avLst/>
+              </a:prstGeom>
+              <a:solidFill>
+                <a:schemeClr val="accent1">
+                  <a:lumMod val="50000"/>
+                </a:schemeClr>
+              </a:solidFill>
+            </p:spPr>
+            <p:style>
+              <a:lnRef idx="2">
+                <a:schemeClr val="accent1">
+                  <a:shade val="15000"/>
+                </a:schemeClr>
+              </a:lnRef>
+              <a:fillRef idx="1">
+                <a:schemeClr val="accent1"/>
+              </a:fillRef>
+              <a:effectRef idx="0">
+                <a:schemeClr val="accent1"/>
+              </a:effectRef>
+              <a:fontRef idx="minor">
+                <a:schemeClr val="lt1"/>
+              </a:fontRef>
+            </p:style>
+            <p:txBody>
+              <a:bodyPr rtlCol="0" anchor="ctr"/>
+              <a:lstStyle/>
+              <a:p>
+                <a:pPr algn="ctr"/>
+                <a:r>
+                  <a:rPr lang="en-US" sz="5400" dirty="0">
+                    <a:latin typeface="Helvetica" panose="020B0604020202020204" pitchFamily="34" charset="0"/>
+                    <a:cs typeface="Helvetica" panose="020B0604020202020204" pitchFamily="34" charset="0"/>
+                  </a:rPr>
+                  <a:t>UMAP of CTG expression</a:t>
+                </a:r>
+              </a:p>
+            </p:txBody>
+          </p:sp>
+          <p:sp>
+            <p:nvSpPr>
+              <p:cNvPr id="1032" name="Rectangle 1031">
+                <a:extLst>
+                  <a:ext uri="{FF2B5EF4-FFF2-40B4-BE49-F238E27FC236}">
+                    <a16:creationId xmlns:a16="http://schemas.microsoft.com/office/drawing/2014/main" id="{F96EADC0-21CD-C13B-10D4-DEAFDB7A264F}"/>
+                  </a:ext>
+                </a:extLst>
+              </p:cNvPr>
+              <p:cNvSpPr/>
+              <p:nvPr/>
+            </p:nvSpPr>
+            <p:spPr>
+              <a:xfrm>
+                <a:off x="1924050" y="5649605"/>
+                <a:ext cx="6362700" cy="5219700"/>
+              </a:xfrm>
+              <a:prstGeom prst="rect">
+                <a:avLst/>
+              </a:prstGeom>
+              <a:noFill/>
+              <a:ln>
+                <a:solidFill>
+                  <a:schemeClr val="tx2">
+                    <a:lumMod val="50000"/>
+                  </a:schemeClr>
+                </a:solidFill>
+              </a:ln>
+            </p:spPr>
+            <p:style>
+              <a:lnRef idx="2">
+                <a:schemeClr val="accent1">
+                  <a:shade val="15000"/>
+                </a:schemeClr>
+              </a:lnRef>
+              <a:fillRef idx="1">
+                <a:schemeClr val="accent1"/>
+              </a:fillRef>
+              <a:effectRef idx="0">
+                <a:schemeClr val="accent1"/>
+              </a:effectRef>
+              <a:fontRef idx="minor">
+                <a:schemeClr val="lt1"/>
+              </a:fontRef>
+            </p:style>
+            <p:txBody>
+              <a:bodyPr rtlCol="0" anchor="ctr"/>
+              <a:lstStyle/>
+              <a:p>
+                <a:pPr algn="ctr"/>
+                <a:endParaRPr lang="en-US"/>
+              </a:p>
+            </p:txBody>
+          </p:sp>
+        </p:grpSp>
+        <p:pic>
+          <p:nvPicPr>
+            <p:cNvPr id="17" name="Picture 6">
+              <a:extLst>
+                <a:ext uri="{FF2B5EF4-FFF2-40B4-BE49-F238E27FC236}">
+                  <a16:creationId xmlns:a16="http://schemas.microsoft.com/office/drawing/2014/main" id="{8700BC8C-DF7D-3A1E-7BF9-08FD9E7AE409}"/>
+                </a:ext>
+              </a:extLst>
+            </p:cNvPr>
+            <p:cNvPicPr>
+              <a:picLocks noChangeAspect="1" noChangeArrowheads="1"/>
+            </p:cNvPicPr>
+            <p:nvPr/>
+          </p:nvPicPr>
+          <p:blipFill rotWithShape="1">
+            <a:blip r:embed="rId5">
+              <a:extLst>
+                <a:ext uri="{28A0092B-C50C-407E-A947-70E740481C1C}">
+                  <a14:useLocalDpi xmlns:a14="http://schemas.microsoft.com/office/drawing/2010/main" val="0"/>
+                </a:ext>
+              </a:extLst>
+            </a:blip>
+            <a:srcRect l="-1" r="-2371" b="61991"/>
+            <a:stretch>
+              <a:fillRect/>
+            </a:stretch>
+          </p:blipFill>
+          <p:spPr bwMode="auto">
+            <a:xfrm>
+              <a:off x="17454812" y="13222408"/>
+              <a:ext cx="11452008" cy="6065562"/>
+            </a:xfrm>
+            <a:prstGeom prst="rect">
+              <a:avLst/>
+            </a:prstGeom>
+            <a:noFill/>
+            <a:extLst>
+              <a:ext uri="{909E8E84-426E-40DD-AFC4-6F175D3DCCD1}">
+                <a14:hiddenFill xmlns:a14="http://schemas.microsoft.com/office/drawing/2010/main">
+                  <a:solidFill>
+                    <a:srgbClr val="FFFFFF"/>
+                  </a:solidFill>
+                </a14:hiddenFill>
+              </a:ext>
+            </a:extLst>
+          </p:spPr>
+        </p:pic>
+      </p:grpSp>
+      <p:grpSp>
+        <p:nvGrpSpPr>
+          <p:cNvPr id="34" name="Group 33">
+            <a:extLst>
+              <a:ext uri="{FF2B5EF4-FFF2-40B4-BE49-F238E27FC236}">
+                <a16:creationId xmlns:a16="http://schemas.microsoft.com/office/drawing/2014/main" id="{A138C493-3C7D-72F8-299B-81B4383D7F51}"/>
+              </a:ext>
+            </a:extLst>
+          </p:cNvPr>
+          <p:cNvGrpSpPr/>
+          <p:nvPr/>
+        </p:nvGrpSpPr>
+        <p:grpSpPr>
+          <a:xfrm>
+            <a:off x="1790699" y="27596479"/>
+            <a:ext cx="10058400" cy="5486400"/>
+            <a:chOff x="1943101" y="26255048"/>
+            <a:chExt cx="10058400" cy="5486400"/>
+          </a:xfrm>
+        </p:grpSpPr>
+        <p:grpSp>
+          <p:nvGrpSpPr>
+            <p:cNvPr id="13" name="Group 12">
+              <a:extLst>
+                <a:ext uri="{FF2B5EF4-FFF2-40B4-BE49-F238E27FC236}">
+                  <a16:creationId xmlns:a16="http://schemas.microsoft.com/office/drawing/2014/main" id="{903DB351-0A8A-26CE-D70F-094C18FC59F8}"/>
+                </a:ext>
+              </a:extLst>
+            </p:cNvPr>
+            <p:cNvGrpSpPr/>
+            <p:nvPr/>
+          </p:nvGrpSpPr>
+          <p:grpSpPr>
+            <a:xfrm>
+              <a:off x="1943101" y="26255048"/>
+              <a:ext cx="10058400" cy="5486400"/>
+              <a:chOff x="1924050" y="5572720"/>
+              <a:chExt cx="6362700" cy="5296585"/>
+            </a:xfrm>
+          </p:grpSpPr>
+          <p:sp>
+            <p:nvSpPr>
+              <p:cNvPr id="14" name="Rectangle 13">
+                <a:extLst>
+                  <a:ext uri="{FF2B5EF4-FFF2-40B4-BE49-F238E27FC236}">
+                    <a16:creationId xmlns:a16="http://schemas.microsoft.com/office/drawing/2014/main" id="{A2E623CF-1DFF-85CE-3BED-32CAAB9F4CC3}"/>
+                  </a:ext>
+                </a:extLst>
+              </p:cNvPr>
+              <p:cNvSpPr/>
+              <p:nvPr/>
+            </p:nvSpPr>
+            <p:spPr>
+              <a:xfrm>
+                <a:off x="1924050" y="5572720"/>
+                <a:ext cx="6362700" cy="923330"/>
+              </a:xfrm>
+              <a:prstGeom prst="rect">
+                <a:avLst/>
+              </a:prstGeom>
+              <a:solidFill>
+                <a:schemeClr val="accent1">
+                  <a:lumMod val="50000"/>
+                </a:schemeClr>
+              </a:solidFill>
+            </p:spPr>
+            <p:style>
+              <a:lnRef idx="2">
+                <a:schemeClr val="accent1">
+                  <a:shade val="15000"/>
+                </a:schemeClr>
+              </a:lnRef>
+              <a:fillRef idx="1">
+                <a:schemeClr val="accent1"/>
+              </a:fillRef>
+              <a:effectRef idx="0">
+                <a:schemeClr val="accent1"/>
+              </a:effectRef>
+              <a:fontRef idx="minor">
+                <a:schemeClr val="lt1"/>
+              </a:fontRef>
+            </p:style>
+            <p:txBody>
+              <a:bodyPr rtlCol="0" anchor="ctr"/>
+              <a:lstStyle/>
+              <a:p>
+                <a:pPr algn="ctr"/>
+                <a:r>
+                  <a:rPr lang="en-US" sz="5400" dirty="0">
+                    <a:latin typeface="Helvetica" panose="020B0604020202020204" pitchFamily="34" charset="0"/>
+                    <a:cs typeface="Helvetica" panose="020B0604020202020204" pitchFamily="34" charset="0"/>
+                  </a:rPr>
+                  <a:t>QC plot</a:t>
+                </a:r>
+              </a:p>
+            </p:txBody>
+          </p:sp>
+          <p:sp>
+            <p:nvSpPr>
+              <p:cNvPr id="15" name="Rectangle 14">
+                <a:extLst>
+                  <a:ext uri="{FF2B5EF4-FFF2-40B4-BE49-F238E27FC236}">
+                    <a16:creationId xmlns:a16="http://schemas.microsoft.com/office/drawing/2014/main" id="{3E92B95C-24FC-DC81-6D5B-C3EF4530CDE0}"/>
+                  </a:ext>
+                </a:extLst>
+              </p:cNvPr>
+              <p:cNvSpPr/>
+              <p:nvPr/>
+            </p:nvSpPr>
+            <p:spPr>
+              <a:xfrm>
+                <a:off x="1924050" y="5649605"/>
+                <a:ext cx="6362700" cy="5219700"/>
+              </a:xfrm>
+              <a:prstGeom prst="rect">
+                <a:avLst/>
+              </a:prstGeom>
+              <a:noFill/>
+              <a:ln>
+                <a:solidFill>
+                  <a:schemeClr val="tx2">
+                    <a:lumMod val="50000"/>
+                  </a:schemeClr>
+                </a:solidFill>
+              </a:ln>
+            </p:spPr>
+            <p:style>
+              <a:lnRef idx="2">
+                <a:schemeClr val="accent1">
+                  <a:shade val="15000"/>
+                </a:schemeClr>
+              </a:lnRef>
+              <a:fillRef idx="1">
+                <a:schemeClr val="accent1"/>
+              </a:fillRef>
+              <a:effectRef idx="0">
+                <a:schemeClr val="accent1"/>
+              </a:effectRef>
+              <a:fontRef idx="minor">
+                <a:schemeClr val="lt1"/>
+              </a:fontRef>
+            </p:style>
+            <p:txBody>
+              <a:bodyPr rtlCol="0" anchor="ctr"/>
+              <a:lstStyle/>
+              <a:p>
+                <a:pPr algn="ctr"/>
+                <a:endParaRPr lang="en-US"/>
+              </a:p>
+            </p:txBody>
+          </p:sp>
+        </p:grpSp>
+        <p:pic>
+          <p:nvPicPr>
+            <p:cNvPr id="18" name="Picture 8">
+              <a:extLst>
+                <a:ext uri="{FF2B5EF4-FFF2-40B4-BE49-F238E27FC236}">
+                  <a16:creationId xmlns:a16="http://schemas.microsoft.com/office/drawing/2014/main" id="{44395874-CBFD-64FA-2AD7-A608666CEDD9}"/>
+                </a:ext>
+              </a:extLst>
+            </p:cNvPr>
+            <p:cNvPicPr>
+              <a:picLocks noChangeAspect="1" noChangeArrowheads="1"/>
+            </p:cNvPicPr>
+            <p:nvPr/>
+          </p:nvPicPr>
+          <p:blipFill>
+            <a:blip r:embed="rId6">
+              <a:extLst>
+                <a:ext uri="{28A0092B-C50C-407E-A947-70E740481C1C}">
+                  <a14:useLocalDpi xmlns:a14="http://schemas.microsoft.com/office/drawing/2010/main" val="0"/>
+                </a:ext>
+              </a:extLst>
+            </a:blip>
+            <a:srcRect/>
+            <a:stretch>
+              <a:fillRect/>
+            </a:stretch>
+          </p:blipFill>
+          <p:spPr bwMode="auto">
+            <a:xfrm>
+              <a:off x="1943101" y="27832625"/>
+              <a:ext cx="4605086" cy="3424295"/>
+            </a:xfrm>
+            <a:prstGeom prst="rect">
+              <a:avLst/>
+            </a:prstGeom>
+            <a:noFill/>
+            <a:extLst>
+              <a:ext uri="{909E8E84-426E-40DD-AFC4-6F175D3DCCD1}">
+                <a14:hiddenFill xmlns:a14="http://schemas.microsoft.com/office/drawing/2010/main">
+                  <a:solidFill>
+                    <a:srgbClr val="FFFFFF"/>
+                  </a:solidFill>
+                </a14:hiddenFill>
+              </a:ext>
+            </a:extLst>
+          </p:spPr>
+        </p:pic>
+        <p:pic>
+          <p:nvPicPr>
+            <p:cNvPr id="21" name="Picture 10">
+              <a:extLst>
+                <a:ext uri="{FF2B5EF4-FFF2-40B4-BE49-F238E27FC236}">
+                  <a16:creationId xmlns:a16="http://schemas.microsoft.com/office/drawing/2014/main" id="{819346B2-E81F-A6EF-E2CD-C843E872D234}"/>
+                </a:ext>
+              </a:extLst>
+            </p:cNvPr>
+            <p:cNvPicPr>
+              <a:picLocks noChangeAspect="1" noChangeArrowheads="1"/>
+            </p:cNvPicPr>
+            <p:nvPr/>
+          </p:nvPicPr>
+          <p:blipFill>
+            <a:blip r:embed="rId7">
+              <a:extLst>
+                <a:ext uri="{28A0092B-C50C-407E-A947-70E740481C1C}">
+                  <a14:useLocalDpi xmlns:a14="http://schemas.microsoft.com/office/drawing/2010/main" val="0"/>
+                </a:ext>
+              </a:extLst>
+            </a:blip>
+            <a:srcRect/>
+            <a:stretch>
+              <a:fillRect/>
+            </a:stretch>
+          </p:blipFill>
+          <p:spPr bwMode="auto">
+            <a:xfrm>
+              <a:off x="6841958" y="27832625"/>
+              <a:ext cx="4761497" cy="3540600"/>
+            </a:xfrm>
+            <a:prstGeom prst="rect">
+              <a:avLst/>
+            </a:prstGeom>
+            <a:noFill/>
+            <a:extLst>
+              <a:ext uri="{909E8E84-426E-40DD-AFC4-6F175D3DCCD1}">
+                <a14:hiddenFill xmlns:a14="http://schemas.microsoft.com/office/drawing/2010/main">
+                  <a:solidFill>
+                    <a:srgbClr val="FFFFFF"/>
+                  </a:solidFill>
+                </a14:hiddenFill>
+              </a:ext>
+            </a:extLst>
+          </p:spPr>
+        </p:pic>
+      </p:grpSp>
+      <p:grpSp>
+        <p:nvGrpSpPr>
+          <p:cNvPr id="44" name="Group 43">
+            <a:extLst>
+              <a:ext uri="{FF2B5EF4-FFF2-40B4-BE49-F238E27FC236}">
+                <a16:creationId xmlns:a16="http://schemas.microsoft.com/office/drawing/2014/main" id="{2C96B9D1-41AF-B90D-EADF-A5F902E9A692}"/>
+              </a:ext>
+            </a:extLst>
+          </p:cNvPr>
+          <p:cNvGrpSpPr/>
+          <p:nvPr/>
+        </p:nvGrpSpPr>
+        <p:grpSpPr>
+          <a:xfrm>
+            <a:off x="30866008" y="12017338"/>
+            <a:ext cx="12255170" cy="7567883"/>
+            <a:chOff x="30866007" y="10637068"/>
+            <a:chExt cx="12255170" cy="7567883"/>
+          </a:xfrm>
+        </p:grpSpPr>
+        <p:grpSp>
+          <p:nvGrpSpPr>
+            <p:cNvPr id="1036" name="Group 1035">
+              <a:extLst>
+                <a:ext uri="{FF2B5EF4-FFF2-40B4-BE49-F238E27FC236}">
+                  <a16:creationId xmlns:a16="http://schemas.microsoft.com/office/drawing/2014/main" id="{0C7B189B-8830-2A23-7363-3BA405CCB1F4}"/>
+                </a:ext>
+              </a:extLst>
+            </p:cNvPr>
+            <p:cNvGrpSpPr/>
+            <p:nvPr/>
+          </p:nvGrpSpPr>
+          <p:grpSpPr>
+            <a:xfrm>
+              <a:off x="30866007" y="10637068"/>
+              <a:ext cx="12153905" cy="7567883"/>
+              <a:chOff x="1924050" y="5572720"/>
+              <a:chExt cx="6362700" cy="5296585"/>
+            </a:xfrm>
+          </p:grpSpPr>
+          <p:sp>
+            <p:nvSpPr>
+              <p:cNvPr id="1037" name="Rectangle 1036">
+                <a:extLst>
+                  <a:ext uri="{FF2B5EF4-FFF2-40B4-BE49-F238E27FC236}">
+                    <a16:creationId xmlns:a16="http://schemas.microsoft.com/office/drawing/2014/main" id="{F91A9106-0AE3-EB2E-46EA-A4E2386BE491}"/>
+                  </a:ext>
+                </a:extLst>
+              </p:cNvPr>
+              <p:cNvSpPr/>
+              <p:nvPr/>
+            </p:nvSpPr>
+            <p:spPr>
+              <a:xfrm>
+                <a:off x="1924050" y="5572720"/>
+                <a:ext cx="6362700" cy="923330"/>
+              </a:xfrm>
+              <a:prstGeom prst="rect">
+                <a:avLst/>
+              </a:prstGeom>
+              <a:solidFill>
+                <a:schemeClr val="accent1">
+                  <a:lumMod val="50000"/>
+                </a:schemeClr>
+              </a:solidFill>
+            </p:spPr>
+            <p:style>
+              <a:lnRef idx="2">
+                <a:schemeClr val="accent1">
+                  <a:shade val="15000"/>
+                </a:schemeClr>
+              </a:lnRef>
+              <a:fillRef idx="1">
+                <a:schemeClr val="accent1"/>
+              </a:fillRef>
+              <a:effectRef idx="0">
+                <a:schemeClr val="accent1"/>
+              </a:effectRef>
+              <a:fontRef idx="minor">
+                <a:schemeClr val="lt1"/>
+              </a:fontRef>
+            </p:style>
+            <p:txBody>
+              <a:bodyPr rtlCol="0" anchor="ctr"/>
+              <a:lstStyle/>
+              <a:p>
+                <a:pPr algn="ctr"/>
+                <a:r>
+                  <a:rPr lang="en-US" sz="5400" dirty="0">
+                    <a:latin typeface="Helvetica" panose="020B0604020202020204" pitchFamily="34" charset="0"/>
+                    <a:cs typeface="Helvetica" panose="020B0604020202020204" pitchFamily="34" charset="0"/>
+                  </a:rPr>
+                  <a:t>Conclusions</a:t>
+                </a:r>
+              </a:p>
+            </p:txBody>
+          </p:sp>
+          <p:sp>
+            <p:nvSpPr>
+              <p:cNvPr id="1038" name="Rectangle 1037">
+                <a:extLst>
+                  <a:ext uri="{FF2B5EF4-FFF2-40B4-BE49-F238E27FC236}">
+                    <a16:creationId xmlns:a16="http://schemas.microsoft.com/office/drawing/2014/main" id="{9F1EC27A-715B-9CA3-78A8-B0A5C954FF45}"/>
+                  </a:ext>
+                </a:extLst>
+              </p:cNvPr>
+              <p:cNvSpPr/>
+              <p:nvPr/>
+            </p:nvSpPr>
+            <p:spPr>
+              <a:xfrm>
+                <a:off x="1924050" y="5649605"/>
+                <a:ext cx="6362700" cy="5219700"/>
+              </a:xfrm>
+              <a:prstGeom prst="rect">
+                <a:avLst/>
+              </a:prstGeom>
+              <a:noFill/>
+              <a:ln>
+                <a:solidFill>
+                  <a:schemeClr val="tx2">
+                    <a:lumMod val="50000"/>
+                  </a:schemeClr>
+                </a:solidFill>
+              </a:ln>
+            </p:spPr>
+            <p:style>
+              <a:lnRef idx="2">
+                <a:schemeClr val="accent1">
+                  <a:shade val="15000"/>
+                </a:schemeClr>
+              </a:lnRef>
+              <a:fillRef idx="1">
+                <a:schemeClr val="accent1"/>
+              </a:fillRef>
+              <a:effectRef idx="0">
+                <a:schemeClr val="accent1"/>
+              </a:effectRef>
+              <a:fontRef idx="minor">
+                <a:schemeClr val="lt1"/>
+              </a:fontRef>
+            </p:style>
+            <p:txBody>
+              <a:bodyPr rtlCol="0" anchor="ctr"/>
+              <a:lstStyle/>
+              <a:p>
+                <a:pPr algn="ctr"/>
+                <a:endParaRPr lang="en-US"/>
+              </a:p>
+            </p:txBody>
+          </p:sp>
+        </p:grpSp>
+        <p:sp>
+          <p:nvSpPr>
+            <p:cNvPr id="22" name="TextBox 21">
+              <a:extLst>
+                <a:ext uri="{FF2B5EF4-FFF2-40B4-BE49-F238E27FC236}">
+                  <a16:creationId xmlns:a16="http://schemas.microsoft.com/office/drawing/2014/main" id="{E15D311D-8FD4-7365-DA92-A2AE17E2654E}"/>
+                </a:ext>
+              </a:extLst>
+            </p:cNvPr>
+            <p:cNvSpPr txBox="1"/>
+            <p:nvPr/>
+          </p:nvSpPr>
+          <p:spPr>
+            <a:xfrm>
+              <a:off x="31428488" y="12198751"/>
+              <a:ext cx="11692689" cy="5632311"/>
+            </a:xfrm>
+            <a:prstGeom prst="rect">
+              <a:avLst/>
+            </a:prstGeom>
+            <a:noFill/>
+          </p:spPr>
+          <p:txBody>
+            <a:bodyPr wrap="square" rtlCol="0">
+              <a:spAutoFit/>
+            </a:bodyPr>
+            <a:lstStyle/>
+            <a:p>
+              <a:pPr marL="285750" indent="-285750">
+                <a:buFont typeface="Arial" panose="020B0604020202020204" pitchFamily="34" charset="0"/>
+                <a:buChar char="•"/>
+              </a:pPr>
+              <a:r>
+                <a:rPr lang="en-US" sz="3600" dirty="0">
+                  <a:latin typeface="Helvetica" panose="020B0604020202020204" pitchFamily="34" charset="0"/>
+                  <a:cs typeface="Helvetica" panose="020B0604020202020204" pitchFamily="34" charset="0"/>
+                </a:rPr>
+                <a:t>CTGs are expressed, in various levels, across the different stages of female fetal development, showing they are a normal part of a developmental gene program</a:t>
+              </a:r>
+            </a:p>
+            <a:p>
+              <a:pPr marL="285750" indent="-285750">
+                <a:buFont typeface="Arial" panose="020B0604020202020204" pitchFamily="34" charset="0"/>
+                <a:buChar char="•"/>
+              </a:pPr>
+              <a:r>
+                <a:rPr lang="en-US" sz="3600" dirty="0">
+                  <a:latin typeface="Helvetica" panose="020B0604020202020204" pitchFamily="34" charset="0"/>
+                  <a:cs typeface="Helvetica" panose="020B0604020202020204" pitchFamily="34" charset="0"/>
+                </a:rPr>
+                <a:t>Expression patterns are consistent with </a:t>
+              </a:r>
+              <a:r>
+                <a:rPr lang="en-US" sz="3600" dirty="0" err="1">
+                  <a:latin typeface="Helvetica" panose="020B0604020202020204" pitchFamily="34" charset="0"/>
+                  <a:cs typeface="Helvetica" panose="020B0604020202020204" pitchFamily="34" charset="0"/>
+                </a:rPr>
+                <a:t>proliferativeative</a:t>
+              </a:r>
+              <a:r>
+                <a:rPr lang="en-US" sz="3600" dirty="0">
+                  <a:latin typeface="Helvetica" panose="020B0604020202020204" pitchFamily="34" charset="0"/>
+                  <a:cs typeface="Helvetica" panose="020B0604020202020204" pitchFamily="34" charset="0"/>
+                </a:rPr>
+                <a:t> states</a:t>
+              </a:r>
+            </a:p>
+            <a:p>
+              <a:pPr marL="285750" indent="-285750">
+                <a:buFont typeface="Arial" panose="020B0604020202020204" pitchFamily="34" charset="0"/>
+                <a:buChar char="•"/>
+              </a:pPr>
+              <a:r>
+                <a:rPr lang="en-US" sz="3600" dirty="0">
+                  <a:latin typeface="Helvetica" panose="020B0604020202020204" pitchFamily="34" charset="0"/>
+                  <a:cs typeface="Helvetica" panose="020B0604020202020204" pitchFamily="34" charset="0"/>
+                </a:rPr>
+                <a:t>These findings could indicate that CTG expression in certain cancers such as ovarian cancer may be a reactivation of these fetal development programs, rather than a random, </a:t>
+              </a:r>
+              <a:r>
+                <a:rPr lang="en-US" sz="3600" dirty="0" err="1">
+                  <a:latin typeface="Helvetica" panose="020B0604020202020204" pitchFamily="34" charset="0"/>
+                  <a:cs typeface="Helvetica" panose="020B0604020202020204" pitchFamily="34" charset="0"/>
+                </a:rPr>
+                <a:t>abberant</a:t>
+              </a:r>
+              <a:r>
+                <a:rPr lang="en-US" sz="3600" dirty="0">
+                  <a:latin typeface="Helvetica" panose="020B0604020202020204" pitchFamily="34" charset="0"/>
+                  <a:cs typeface="Helvetica" panose="020B0604020202020204" pitchFamily="34" charset="0"/>
+                </a:rPr>
+                <a:t> gene reactivation</a:t>
+              </a:r>
+            </a:p>
+          </p:txBody>
+        </p:sp>
+      </p:grpSp>
+      <p:sp>
+        <p:nvSpPr>
+          <p:cNvPr id="30" name="TextBox 29">
+            <a:extLst>
+              <a:ext uri="{FF2B5EF4-FFF2-40B4-BE49-F238E27FC236}">
+                <a16:creationId xmlns:a16="http://schemas.microsoft.com/office/drawing/2014/main" id="{11EFA8F4-4044-E12F-E4B1-F1DFCC7E7E34}"/>
+              </a:ext>
+            </a:extLst>
+          </p:cNvPr>
+          <p:cNvSpPr txBox="1"/>
+          <p:nvPr/>
+        </p:nvSpPr>
+        <p:spPr>
+          <a:xfrm>
+            <a:off x="31428489" y="21653515"/>
+            <a:ext cx="11692689" cy="3416320"/>
+          </a:xfrm>
+          <a:prstGeom prst="rect">
+            <a:avLst/>
+          </a:prstGeom>
+          <a:noFill/>
+        </p:spPr>
+        <p:txBody>
+          <a:bodyPr wrap="square" rtlCol="0">
+            <a:spAutoFit/>
+          </a:bodyPr>
+          <a:lstStyle/>
+          <a:p>
+            <a:pPr marL="285750" indent="-285750">
+              <a:buFont typeface="Arial" panose="020B0604020202020204" pitchFamily="34" charset="0"/>
+              <a:buChar char="•"/>
+            </a:pPr>
+            <a:r>
+              <a:rPr lang="en-US" sz="3600" dirty="0">
+                <a:latin typeface="Helvetica" panose="020B0604020202020204" pitchFamily="34" charset="0"/>
+                <a:cs typeface="Helvetica" panose="020B0604020202020204" pitchFamily="34" charset="0"/>
+              </a:rPr>
+              <a:t>Use </a:t>
+            </a:r>
+            <a:r>
+              <a:rPr lang="en-US" sz="3600" dirty="0" err="1">
+                <a:latin typeface="Helvetica" panose="020B0604020202020204" pitchFamily="34" charset="0"/>
+                <a:cs typeface="Helvetica" panose="020B0604020202020204" pitchFamily="34" charset="0"/>
+              </a:rPr>
+              <a:t>multitomoic</a:t>
+            </a:r>
+            <a:r>
+              <a:rPr lang="en-US" sz="3600" dirty="0">
+                <a:latin typeface="Helvetica" panose="020B0604020202020204" pitchFamily="34" charset="0"/>
+                <a:cs typeface="Helvetica" panose="020B0604020202020204" pitchFamily="34" charset="0"/>
+              </a:rPr>
+              <a:t> data to investigate </a:t>
+            </a:r>
+            <a:r>
+              <a:rPr lang="en-US" sz="3600" dirty="0" err="1">
+                <a:latin typeface="Helvetica" panose="020B0604020202020204" pitchFamily="34" charset="0"/>
+                <a:cs typeface="Helvetica" panose="020B0604020202020204" pitchFamily="34" charset="0"/>
+              </a:rPr>
+              <a:t>epigentic</a:t>
+            </a:r>
+            <a:r>
+              <a:rPr lang="en-US" sz="3600" dirty="0">
+                <a:latin typeface="Helvetica" panose="020B0604020202020204" pitchFamily="34" charset="0"/>
+                <a:cs typeface="Helvetica" panose="020B0604020202020204" pitchFamily="34" charset="0"/>
+              </a:rPr>
+              <a:t> regulation of CTGs in both fetal and tumor development</a:t>
+            </a:r>
+          </a:p>
+          <a:p>
+            <a:pPr marL="285750" indent="-285750">
+              <a:buFont typeface="Arial" panose="020B0604020202020204" pitchFamily="34" charset="0"/>
+              <a:buChar char="•"/>
+            </a:pPr>
+            <a:r>
+              <a:rPr lang="en-US" sz="3600" dirty="0">
+                <a:latin typeface="Helvetica" panose="020B0604020202020204" pitchFamily="34" charset="0"/>
+                <a:cs typeface="Helvetica" panose="020B0604020202020204" pitchFamily="34" charset="0"/>
+              </a:rPr>
+              <a:t>Extent analysis to include additional fetal development data and cancer data</a:t>
+            </a:r>
+          </a:p>
+          <a:p>
+            <a:pPr marL="285750" indent="-285750">
+              <a:buFont typeface="Arial" panose="020B0604020202020204" pitchFamily="34" charset="0"/>
+              <a:buChar char="•"/>
+            </a:pPr>
+            <a:r>
+              <a:rPr lang="en-US" sz="3600" dirty="0">
+                <a:latin typeface="Helvetica" panose="020B0604020202020204" pitchFamily="34" charset="0"/>
+                <a:cs typeface="Helvetica" panose="020B0604020202020204" pitchFamily="34" charset="0"/>
+              </a:rPr>
+              <a:t>Determine the biological role of CTGs in fetal cell proliferation and differentiation</a:t>
+            </a:r>
+          </a:p>
+        </p:txBody>
+      </p:sp>
+      <p:grpSp>
+        <p:nvGrpSpPr>
+          <p:cNvPr id="41" name="Group 40">
+            <a:extLst>
+              <a:ext uri="{FF2B5EF4-FFF2-40B4-BE49-F238E27FC236}">
+                <a16:creationId xmlns:a16="http://schemas.microsoft.com/office/drawing/2014/main" id="{3D1F6C4C-B511-97FC-53C5-15991CDF0A53}"/>
+              </a:ext>
+            </a:extLst>
+          </p:cNvPr>
+          <p:cNvGrpSpPr/>
+          <p:nvPr/>
+        </p:nvGrpSpPr>
+        <p:grpSpPr>
+          <a:xfrm>
+            <a:off x="1600698" y="15130224"/>
+            <a:ext cx="13820780" cy="2529293"/>
+            <a:chOff x="28147374" y="26631918"/>
+            <a:chExt cx="13820780" cy="2529293"/>
+          </a:xfrm>
+        </p:grpSpPr>
+        <p:grpSp>
+          <p:nvGrpSpPr>
+            <p:cNvPr id="33" name="Group 32">
+              <a:extLst>
+                <a:ext uri="{FF2B5EF4-FFF2-40B4-BE49-F238E27FC236}">
+                  <a16:creationId xmlns:a16="http://schemas.microsoft.com/office/drawing/2014/main" id="{D98999BE-5ACB-8619-3A54-51A0AF311222}"/>
+                </a:ext>
+              </a:extLst>
+            </p:cNvPr>
+            <p:cNvGrpSpPr/>
+            <p:nvPr/>
+          </p:nvGrpSpPr>
+          <p:grpSpPr>
+            <a:xfrm>
+              <a:off x="28147374" y="26631918"/>
+              <a:ext cx="13563602" cy="2529293"/>
+              <a:chOff x="1790700" y="12645762"/>
+              <a:chExt cx="10058400" cy="2000967"/>
+            </a:xfrm>
+          </p:grpSpPr>
+          <p:sp>
+            <p:nvSpPr>
+              <p:cNvPr id="25" name="Rectangle 24">
+                <a:extLst>
+                  <a:ext uri="{FF2B5EF4-FFF2-40B4-BE49-F238E27FC236}">
+                    <a16:creationId xmlns:a16="http://schemas.microsoft.com/office/drawing/2014/main" id="{CE36AD40-FF0F-9D84-F1A8-DBA871055B69}"/>
+                  </a:ext>
+                </a:extLst>
+              </p:cNvPr>
+              <p:cNvSpPr/>
+              <p:nvPr/>
+            </p:nvSpPr>
+            <p:spPr>
+              <a:xfrm>
+                <a:off x="1790700" y="12645762"/>
+                <a:ext cx="10058400" cy="956420"/>
+              </a:xfrm>
+              <a:prstGeom prst="rect">
+                <a:avLst/>
+              </a:prstGeom>
+              <a:solidFill>
+                <a:schemeClr val="accent1">
+                  <a:lumMod val="50000"/>
+                </a:schemeClr>
+              </a:solidFill>
+            </p:spPr>
+            <p:style>
+              <a:lnRef idx="2">
+                <a:schemeClr val="accent1">
+                  <a:shade val="15000"/>
+                </a:schemeClr>
+              </a:lnRef>
+              <a:fillRef idx="1">
+                <a:schemeClr val="accent1"/>
+              </a:fillRef>
+              <a:effectRef idx="0">
+                <a:schemeClr val="accent1"/>
+              </a:effectRef>
+              <a:fontRef idx="minor">
+                <a:schemeClr val="lt1"/>
+              </a:fontRef>
+            </p:style>
+            <p:txBody>
+              <a:bodyPr rtlCol="0" anchor="ctr"/>
+              <a:lstStyle/>
+              <a:p>
+                <a:pPr algn="ctr"/>
+                <a:r>
+                  <a:rPr lang="en-US" sz="5400" dirty="0">
+                    <a:latin typeface="Helvetica" panose="020B0604020202020204" pitchFamily="34" charset="0"/>
+                    <a:cs typeface="Helvetica" panose="020B0604020202020204" pitchFamily="34" charset="0"/>
+                  </a:rPr>
+                  <a:t>Hypothesis</a:t>
+                </a:r>
+              </a:p>
+            </p:txBody>
+          </p:sp>
+          <p:sp>
+            <p:nvSpPr>
+              <p:cNvPr id="26" name="Rectangle 25">
+                <a:extLst>
+                  <a:ext uri="{FF2B5EF4-FFF2-40B4-BE49-F238E27FC236}">
+                    <a16:creationId xmlns:a16="http://schemas.microsoft.com/office/drawing/2014/main" id="{E0713B02-2457-7250-1C38-BB2E15F06985}"/>
+                  </a:ext>
+                </a:extLst>
+              </p:cNvPr>
+              <p:cNvSpPr/>
+              <p:nvPr/>
+            </p:nvSpPr>
+            <p:spPr>
+              <a:xfrm>
+                <a:off x="1790700" y="12725402"/>
+                <a:ext cx="10058400" cy="1921327"/>
+              </a:xfrm>
+              <a:prstGeom prst="rect">
+                <a:avLst/>
+              </a:prstGeom>
+              <a:noFill/>
+              <a:ln>
+                <a:solidFill>
+                  <a:schemeClr val="tx2">
+                    <a:lumMod val="50000"/>
+                  </a:schemeClr>
+                </a:solidFill>
+              </a:ln>
+            </p:spPr>
+            <p:style>
+              <a:lnRef idx="2">
+                <a:schemeClr val="accent1">
+                  <a:shade val="15000"/>
+                </a:schemeClr>
+              </a:lnRef>
+              <a:fillRef idx="1">
+                <a:schemeClr val="accent1"/>
+              </a:fillRef>
+              <a:effectRef idx="0">
+                <a:schemeClr val="accent1"/>
+              </a:effectRef>
+              <a:fontRef idx="minor">
+                <a:schemeClr val="lt1"/>
+              </a:fontRef>
+            </p:style>
+            <p:txBody>
+              <a:bodyPr rtlCol="0" anchor="ctr"/>
+              <a:lstStyle/>
+              <a:p>
+                <a:pPr algn="ctr"/>
+                <a:endParaRPr lang="en-US"/>
+              </a:p>
+            </p:txBody>
+          </p:sp>
+        </p:grpSp>
+        <p:sp>
+          <p:nvSpPr>
+            <p:cNvPr id="40" name="TextBox 39">
+              <a:extLst>
+                <a:ext uri="{FF2B5EF4-FFF2-40B4-BE49-F238E27FC236}">
+                  <a16:creationId xmlns:a16="http://schemas.microsoft.com/office/drawing/2014/main" id="{B49C8DAC-1E83-67B0-0963-C893990C9745}"/>
+                </a:ext>
+              </a:extLst>
+            </p:cNvPr>
+            <p:cNvSpPr txBox="1"/>
+            <p:nvPr/>
+          </p:nvSpPr>
+          <p:spPr>
+            <a:xfrm>
+              <a:off x="28404552" y="27941417"/>
+              <a:ext cx="13563602" cy="1200329"/>
+            </a:xfrm>
+            <a:prstGeom prst="rect">
+              <a:avLst/>
+            </a:prstGeom>
+            <a:noFill/>
+          </p:spPr>
+          <p:txBody>
+            <a:bodyPr wrap="square" rtlCol="0">
+              <a:spAutoFit/>
+            </a:bodyPr>
+            <a:lstStyle/>
+            <a:p>
+              <a:pPr marL="285750" indent="-285750">
+                <a:buFont typeface="Arial" panose="020B0604020202020204" pitchFamily="34" charset="0"/>
+                <a:buChar char="•"/>
+              </a:pPr>
+              <a:r>
+                <a:rPr lang="en-US" sz="3600" dirty="0">
+                  <a:latin typeface="Helvetica" panose="020B0604020202020204" pitchFamily="34" charset="0"/>
+                  <a:cs typeface="Helvetica" panose="020B0604020202020204" pitchFamily="34" charset="0"/>
+                </a:rPr>
+                <a:t>CTGs are transiently expressed in specific cell populations during female fetal development</a:t>
+              </a:r>
+            </a:p>
+          </p:txBody>
+        </p:sp>
+      </p:grpSp>
+      <p:grpSp>
+        <p:nvGrpSpPr>
+          <p:cNvPr id="45" name="Group 44">
+            <a:extLst>
+              <a:ext uri="{FF2B5EF4-FFF2-40B4-BE49-F238E27FC236}">
+                <a16:creationId xmlns:a16="http://schemas.microsoft.com/office/drawing/2014/main" id="{37AADAED-9B19-498D-5A24-FED27D99C068}"/>
+              </a:ext>
+            </a:extLst>
+          </p:cNvPr>
+          <p:cNvGrpSpPr/>
+          <p:nvPr/>
+        </p:nvGrpSpPr>
+        <p:grpSpPr>
+          <a:xfrm>
+            <a:off x="30991839" y="3542293"/>
+            <a:ext cx="11902241" cy="9100520"/>
+            <a:chOff x="1924050" y="5572720"/>
+            <a:chExt cx="6362700" cy="5296585"/>
+          </a:xfrm>
+        </p:grpSpPr>
+        <p:sp>
+          <p:nvSpPr>
+            <p:cNvPr id="46" name="Rectangle 45">
+              <a:extLst>
+                <a:ext uri="{FF2B5EF4-FFF2-40B4-BE49-F238E27FC236}">
+                  <a16:creationId xmlns:a16="http://schemas.microsoft.com/office/drawing/2014/main" id="{A8A6C98B-8362-895B-31A7-969C8B0BA048}"/>
+                </a:ext>
+              </a:extLst>
+            </p:cNvPr>
+            <p:cNvSpPr/>
+            <p:nvPr/>
+          </p:nvSpPr>
+          <p:spPr>
+            <a:xfrm>
+              <a:off x="1924050" y="5572720"/>
+              <a:ext cx="6362700" cy="923330"/>
+            </a:xfrm>
+            <a:prstGeom prst="rect">
+              <a:avLst/>
+            </a:prstGeom>
+            <a:solidFill>
+              <a:schemeClr val="accent1">
+                <a:lumMod val="50000"/>
+              </a:schemeClr>
+            </a:solidFill>
+          </p:spPr>
+          <p:style>
+            <a:lnRef idx="2">
+              <a:schemeClr val="accent1">
+                <a:shade val="15000"/>
+              </a:schemeClr>
+            </a:lnRef>
+            <a:fillRef idx="1">
+              <a:schemeClr val="accent1"/>
+            </a:fillRef>
+            <a:effectRef idx="0">
+              <a:schemeClr val="accent1"/>
+            </a:effectRef>
+            <a:fontRef idx="minor">
+              <a:schemeClr val="lt1"/>
+            </a:fontRef>
+          </p:style>
+          <p:txBody>
+            <a:bodyPr rtlCol="0" anchor="ctr"/>
+            <a:lstStyle/>
+            <a:p>
+              <a:pPr algn="ctr"/>
+              <a:r>
+                <a:rPr lang="en-US" sz="5400" dirty="0">
+                  <a:latin typeface="Helvetica" panose="020B0604020202020204" pitchFamily="34" charset="0"/>
+                  <a:cs typeface="Helvetica" panose="020B0604020202020204" pitchFamily="34" charset="0"/>
+                </a:rPr>
+                <a:t>Ovarian cancer </a:t>
+              </a:r>
+              <a:r>
+                <a:rPr lang="en-US" sz="5400" dirty="0" err="1">
+                  <a:latin typeface="Helvetica" panose="020B0604020202020204" pitchFamily="34" charset="0"/>
+                  <a:cs typeface="Helvetica" panose="020B0604020202020204" pitchFamily="34" charset="0"/>
+                </a:rPr>
+                <a:t>dotplot</a:t>
+              </a:r>
+              <a:endParaRPr lang="en-US" sz="5400" dirty="0">
+                <a:latin typeface="Helvetica" panose="020B0604020202020204" pitchFamily="34" charset="0"/>
+                <a:cs typeface="Helvetica" panose="020B0604020202020204" pitchFamily="34" charset="0"/>
+              </a:endParaRPr>
+            </a:p>
+          </p:txBody>
+        </p:sp>
+        <p:sp>
+          <p:nvSpPr>
+            <p:cNvPr id="47" name="Rectangle 46">
+              <a:extLst>
+                <a:ext uri="{FF2B5EF4-FFF2-40B4-BE49-F238E27FC236}">
+                  <a16:creationId xmlns:a16="http://schemas.microsoft.com/office/drawing/2014/main" id="{98CD046C-CF97-A780-5BEF-E37EDF5DE756}"/>
+                </a:ext>
+              </a:extLst>
+            </p:cNvPr>
+            <p:cNvSpPr/>
+            <p:nvPr/>
+          </p:nvSpPr>
+          <p:spPr>
+            <a:xfrm>
+              <a:off x="1924050" y="5649605"/>
+              <a:ext cx="6362700" cy="5219700"/>
+            </a:xfrm>
+            <a:prstGeom prst="rect">
+              <a:avLst/>
+            </a:prstGeom>
+            <a:noFill/>
+            <a:ln>
+              <a:solidFill>
+                <a:schemeClr val="tx2">
+                  <a:lumMod val="50000"/>
+                </a:schemeClr>
+              </a:solidFill>
+            </a:ln>
+          </p:spPr>
+          <p:style>
+            <a:lnRef idx="2">
+              <a:schemeClr val="accent1">
+                <a:shade val="15000"/>
+              </a:schemeClr>
+            </a:lnRef>
+            <a:fillRef idx="1">
+              <a:schemeClr val="accent1"/>
+            </a:fillRef>
+            <a:effectRef idx="0">
+              <a:schemeClr val="accent1"/>
+            </a:effectRef>
+            <a:fontRef idx="minor">
+              <a:schemeClr val="lt1"/>
+            </a:fontRef>
+          </p:style>
+          <p:txBody>
+            <a:bodyPr rtlCol="0" anchor="ctr"/>
+            <a:lstStyle/>
+            <a:p>
+              <a:pPr algn="ctr"/>
+              <a:endParaRPr lang="en-US"/>
+            </a:p>
+          </p:txBody>
+        </p:sp>
+      </p:grpSp>
+      <p:pic>
+        <p:nvPicPr>
+          <p:cNvPr id="51" name="Picture 12">
+            <a:extLst>
+              <a:ext uri="{FF2B5EF4-FFF2-40B4-BE49-F238E27FC236}">
+                <a16:creationId xmlns:a16="http://schemas.microsoft.com/office/drawing/2014/main" id="{CE49A8AC-577E-F2BA-F8F8-3619F334AF01}"/>
+              </a:ext>
+            </a:extLst>
+          </p:cNvPr>
+          <p:cNvPicPr>
+            <a:picLocks noChangeAspect="1" noChangeArrowheads="1"/>
+          </p:cNvPicPr>
+          <p:nvPr/>
+        </p:nvPicPr>
+        <p:blipFill>
+          <a:blip r:embed="rId8">
+            <a:extLst>
+              <a:ext uri="{28A0092B-C50C-407E-A947-70E740481C1C}">
+                <a14:useLocalDpi xmlns:a14="http://schemas.microsoft.com/office/drawing/2010/main" val="0"/>
+              </a:ext>
+            </a:extLst>
+          </a:blip>
+          <a:srcRect/>
+          <a:stretch>
+            <a:fillRect/>
+          </a:stretch>
+        </p:blipFill>
+        <p:spPr bwMode="auto">
+          <a:xfrm>
+            <a:off x="29340290" y="5712918"/>
+            <a:ext cx="14262905" cy="3674137"/>
+          </a:xfrm>
+          <a:prstGeom prst="rect">
+            <a:avLst/>
+          </a:prstGeom>
+          <a:noFill/>
+          <a:extLst>
+            <a:ext uri="{909E8E84-426E-40DD-AFC4-6F175D3DCCD1}">
+              <a14:hiddenFill xmlns:a14="http://schemas.microsoft.com/office/drawing/2010/main">
+                <a:solidFill>
+                  <a:srgbClr val="FFFFFF"/>
+                </a:solidFill>
+              </a14:hiddenFill>
+            </a:ext>
+          </a:extLst>
+        </p:spPr>
+      </p:pic>
     </p:spTree>
     <p:extLst>
       <p:ext uri="{BB962C8B-B14F-4D97-AF65-F5344CB8AC3E}">
